--- a/LabBook_3.pptx
+++ b/LabBook_3.pptx
@@ -5,19 +5,22 @@
     <p:sldMasterId id="2147483648" r:id="rId1"/>
   </p:sldMasterIdLst>
   <p:notesMasterIdLst>
-    <p:notesMasterId r:id="rId9"/>
+    <p:notesMasterId r:id="rId12"/>
   </p:notesMasterIdLst>
   <p:handoutMasterIdLst>
-    <p:handoutMasterId r:id="rId10"/>
+    <p:handoutMasterId r:id="rId13"/>
   </p:handoutMasterIdLst>
   <p:sldIdLst>
     <p:sldId id="256" r:id="rId2"/>
     <p:sldId id="289" r:id="rId3"/>
     <p:sldId id="290" r:id="rId4"/>
-    <p:sldId id="295" r:id="rId5"/>
-    <p:sldId id="296" r:id="rId6"/>
-    <p:sldId id="293" r:id="rId7"/>
-    <p:sldId id="288" r:id="rId8"/>
+    <p:sldId id="297" r:id="rId5"/>
+    <p:sldId id="298" r:id="rId6"/>
+    <p:sldId id="295" r:id="rId7"/>
+    <p:sldId id="296" r:id="rId8"/>
+    <p:sldId id="299" r:id="rId9"/>
+    <p:sldId id="293" r:id="rId10"/>
+    <p:sldId id="288" r:id="rId11"/>
   </p:sldIdLst>
   <p:sldSz cx="12192000" cy="6858000"/>
   <p:notesSz cx="12192000" cy="6858000"/>
@@ -849,7 +852,7 @@
           <a:p>
             <a:fld id="{676223B9-C868-4436-87D9-1A3152E1157A}" type="slidenum">
               <a:rPr lang="es-ES" smtClean="0"/>
-              <a:t>4</a:t>
+              <a:t>6</a:t>
             </a:fld>
             <a:endParaRPr lang="es-ES"/>
           </a:p>
@@ -957,7 +960,7 @@
           <a:p>
             <a:fld id="{676223B9-C868-4436-87D9-1A3152E1157A}" type="slidenum">
               <a:rPr lang="es-ES" smtClean="0"/>
-              <a:t>5</a:t>
+              <a:t>7</a:t>
             </a:fld>
             <a:endParaRPr lang="es-ES"/>
           </a:p>
@@ -1065,7 +1068,7 @@
           <a:p>
             <a:fld id="{676223B9-C868-4436-87D9-1A3152E1157A}" type="slidenum">
               <a:rPr lang="es-ES" smtClean="0"/>
-              <a:t>6</a:t>
+              <a:t>9</a:t>
             </a:fld>
             <a:endParaRPr lang="es-ES"/>
           </a:p>
@@ -2702,6 +2705,159 @@
             <a:fld id="{B6F15528-21DE-4FAA-801E-634DDDAF4B2B}" type="slidenum">
               <a:rPr lang="es-ES" smtClean="0"/>
               <a:t>1</a:t>
+            </a:fld>
+            <a:endParaRPr lang="es-ES"/>
+          </a:p>
+        </p:txBody>
+      </p:sp>
+    </p:spTree>
+  </p:cSld>
+  <p:clrMapOvr>
+    <a:masterClrMapping/>
+  </p:clrMapOvr>
+</p:sld>
+</file>
+
+<file path=ppt/slides/slide10.xml><?xml version="1.0" encoding="utf-8"?>
+<p:sld xmlns:a="http://schemas.openxmlformats.org/drawingml/2006/main" xmlns:r="http://schemas.openxmlformats.org/officeDocument/2006/relationships" xmlns:p="http://schemas.openxmlformats.org/presentationml/2006/main">
+  <p:cSld>
+    <p:spTree>
+      <p:nvGrpSpPr>
+        <p:cNvPr id="1" name=""/>
+        <p:cNvGrpSpPr/>
+        <p:nvPr/>
+      </p:nvGrpSpPr>
+      <p:grpSpPr>
+        <a:xfrm>
+          <a:off x="0" y="0"/>
+          <a:ext cx="0" cy="0"/>
+          <a:chOff x="0" y="0"/>
+          <a:chExt cx="0" cy="0"/>
+        </a:xfrm>
+      </p:grpSpPr>
+      <p:sp>
+        <p:nvSpPr>
+          <p:cNvPr id="3" name="object 3"/>
+          <p:cNvSpPr/>
+          <p:nvPr/>
+        </p:nvSpPr>
+        <p:spPr>
+          <a:xfrm>
+            <a:off x="3945635" y="2636520"/>
+            <a:ext cx="8246363" cy="1584959"/>
+          </a:xfrm>
+          <a:prstGeom prst="rect">
+            <a:avLst/>
+          </a:prstGeom>
+          <a:blipFill>
+            <a:blip r:embed="rId2" cstate="print"/>
+            <a:stretch>
+              <a:fillRect/>
+            </a:stretch>
+          </a:blipFill>
+        </p:spPr>
+        <p:txBody>
+          <a:bodyPr wrap="square" lIns="0" tIns="0" rIns="0" bIns="0" rtlCol="0"/>
+          <a:lstStyle/>
+          <a:p>
+            <a:endParaRPr/>
+          </a:p>
+        </p:txBody>
+      </p:sp>
+      <p:sp>
+        <p:nvSpPr>
+          <p:cNvPr id="4" name="object 4"/>
+          <p:cNvSpPr txBox="1">
+            <a:spLocks noGrp="1"/>
+          </p:cNvSpPr>
+          <p:nvPr>
+            <p:ph type="title"/>
+          </p:nvPr>
+        </p:nvSpPr>
+        <p:spPr>
+          <a:xfrm>
+            <a:off x="4513326" y="3165729"/>
+            <a:ext cx="2233295" cy="513715"/>
+          </a:xfrm>
+          <a:prstGeom prst="rect">
+            <a:avLst/>
+          </a:prstGeom>
+        </p:spPr>
+        <p:txBody>
+          <a:bodyPr vert="horz" wrap="square" lIns="0" tIns="13335" rIns="0" bIns="0" rtlCol="0">
+            <a:spAutoFit/>
+          </a:bodyPr>
+          <a:lstStyle/>
+          <a:p>
+            <a:pPr marL="12700">
+              <a:lnSpc>
+                <a:spcPct val="100000"/>
+              </a:lnSpc>
+              <a:spcBef>
+                <a:spcPts val="105"/>
+              </a:spcBef>
+            </a:pPr>
+            <a:r>
+              <a:rPr sz="3200" b="1" spc="-5" dirty="0">
+                <a:solidFill>
+                  <a:srgbClr val="FFFFFF"/>
+                </a:solidFill>
+                <a:latin typeface="Lucida Sans"/>
+                <a:cs typeface="Lucida Sans"/>
+              </a:rPr>
+              <a:t>Thank</a:t>
+            </a:r>
+            <a:r>
+              <a:rPr sz="3200" b="1" spc="-55" dirty="0">
+                <a:solidFill>
+                  <a:srgbClr val="FFFFFF"/>
+                </a:solidFill>
+                <a:latin typeface="Lucida Sans"/>
+                <a:cs typeface="Lucida Sans"/>
+              </a:rPr>
+              <a:t> </a:t>
+            </a:r>
+            <a:r>
+              <a:rPr sz="3200" b="1" dirty="0">
+                <a:solidFill>
+                  <a:srgbClr val="FFFFFF"/>
+                </a:solidFill>
+                <a:latin typeface="Lucida Sans"/>
+                <a:cs typeface="Lucida Sans"/>
+              </a:rPr>
+              <a:t>you</a:t>
+            </a:r>
+            <a:endParaRPr sz="3200">
+              <a:latin typeface="Lucida Sans"/>
+              <a:cs typeface="Lucida Sans"/>
+            </a:endParaRPr>
+          </a:p>
+        </p:txBody>
+      </p:sp>
+      <p:sp>
+        <p:nvSpPr>
+          <p:cNvPr id="5" name="Marcador de número de diapositiva 4">
+            <a:extLst>
+              <a:ext uri="{FF2B5EF4-FFF2-40B4-BE49-F238E27FC236}">
+                <a16:creationId xmlns:a16="http://schemas.microsoft.com/office/drawing/2014/main" id="{B052DA19-AD24-7D24-2AE9-51F8F5A7F5E0}"/>
+              </a:ext>
+            </a:extLst>
+          </p:cNvPr>
+          <p:cNvSpPr>
+            <a:spLocks noGrp="1"/>
+          </p:cNvSpPr>
+          <p:nvPr>
+            <p:ph type="sldNum" sz="quarter" idx="7"/>
+          </p:nvPr>
+        </p:nvSpPr>
+        <p:spPr/>
+        <p:txBody>
+          <a:bodyPr/>
+          <a:lstStyle/>
+          <a:p>
+            <a:fld id="{B6F15528-21DE-4FAA-801E-634DDDAF4B2B}" type="slidenum">
+              <a:rPr lang="es-ES" smtClean="0"/>
+              <a:t>10</a:t>
             </a:fld>
             <a:endParaRPr lang="es-ES"/>
           </a:p>
@@ -4872,6 +5028,622 @@
   <p:cSld>
     <p:spTree>
       <p:nvGrpSpPr>
+        <p:cNvPr id="1" name=""/>
+        <p:cNvGrpSpPr/>
+        <p:nvPr/>
+      </p:nvGrpSpPr>
+      <p:grpSpPr>
+        <a:xfrm>
+          <a:off x="0" y="0"/>
+          <a:ext cx="0" cy="0"/>
+          <a:chOff x="0" y="0"/>
+          <a:chExt cx="0" cy="0"/>
+        </a:xfrm>
+      </p:grpSpPr>
+      <p:sp>
+        <p:nvSpPr>
+          <p:cNvPr id="2" name="Título 1">
+            <a:extLst>
+              <a:ext uri="{FF2B5EF4-FFF2-40B4-BE49-F238E27FC236}">
+                <a16:creationId xmlns:a16="http://schemas.microsoft.com/office/drawing/2014/main" id="{42C7B060-DE26-7B6D-CA6D-53FA0A01F60C}"/>
+              </a:ext>
+            </a:extLst>
+          </p:cNvPr>
+          <p:cNvSpPr>
+            <a:spLocks noGrp="1"/>
+          </p:cNvSpPr>
+          <p:nvPr>
+            <p:ph type="title"/>
+          </p:nvPr>
+        </p:nvSpPr>
+        <p:spPr/>
+        <p:txBody>
+          <a:bodyPr/>
+          <a:lstStyle/>
+          <a:p>
+            <a:r>
+              <a:rPr lang="es-ES" dirty="0"/>
+              <a:t>RESULTADOS ASSESSMENT 1</a:t>
+            </a:r>
+          </a:p>
+        </p:txBody>
+      </p:sp>
+      <p:sp>
+        <p:nvSpPr>
+          <p:cNvPr id="3" name="Marcador de texto 2">
+            <a:extLst>
+              <a:ext uri="{FF2B5EF4-FFF2-40B4-BE49-F238E27FC236}">
+                <a16:creationId xmlns:a16="http://schemas.microsoft.com/office/drawing/2014/main" id="{00664E0F-23D2-7384-575D-BFFE4699F858}"/>
+              </a:ext>
+            </a:extLst>
+          </p:cNvPr>
+          <p:cNvSpPr>
+            <a:spLocks noGrp="1"/>
+          </p:cNvSpPr>
+          <p:nvPr>
+            <p:ph type="body" idx="1"/>
+          </p:nvPr>
+        </p:nvSpPr>
+        <p:spPr>
+          <a:xfrm>
+            <a:off x="4254759" y="4171057"/>
+            <a:ext cx="7010400" cy="184666"/>
+          </a:xfrm>
+        </p:spPr>
+        <p:txBody>
+          <a:bodyPr/>
+          <a:lstStyle/>
+          <a:p>
+            <a:r>
+              <a:rPr lang="es-ES" sz="1200" dirty="0"/>
+              <a:t>He cambiado los índices efectivos en este caso hemos pasado de SOI a SIN con aire …</a:t>
+            </a:r>
+          </a:p>
+        </p:txBody>
+      </p:sp>
+      <p:sp>
+        <p:nvSpPr>
+          <p:cNvPr id="4" name="Marcador de pie de página 3">
+            <a:extLst>
+              <a:ext uri="{FF2B5EF4-FFF2-40B4-BE49-F238E27FC236}">
+                <a16:creationId xmlns:a16="http://schemas.microsoft.com/office/drawing/2014/main" id="{00A33CC4-216D-1022-77CB-9102CB3E8B2A}"/>
+              </a:ext>
+            </a:extLst>
+          </p:cNvPr>
+          <p:cNvSpPr>
+            <a:spLocks noGrp="1"/>
+          </p:cNvSpPr>
+          <p:nvPr>
+            <p:ph type="ftr" sz="quarter" idx="5"/>
+          </p:nvPr>
+        </p:nvSpPr>
+        <p:spPr/>
+        <p:txBody>
+          <a:bodyPr/>
+          <a:lstStyle/>
+          <a:p>
+            <a:pPr marL="12700">
+              <a:spcBef>
+                <a:spcPts val="15"/>
+              </a:spcBef>
+            </a:pPr>
+            <a:r>
+              <a:rPr lang="es-ES" spc="-5"/>
+              <a:t>LAB 3. INTERFEROMETERS I</a:t>
+            </a:r>
+            <a:endParaRPr lang="es-ES" spc="-5" dirty="0"/>
+          </a:p>
+        </p:txBody>
+      </p:sp>
+      <p:sp>
+        <p:nvSpPr>
+          <p:cNvPr id="5" name="Marcador de número de diapositiva 4">
+            <a:extLst>
+              <a:ext uri="{FF2B5EF4-FFF2-40B4-BE49-F238E27FC236}">
+                <a16:creationId xmlns:a16="http://schemas.microsoft.com/office/drawing/2014/main" id="{59AA8F1D-CA29-56C3-54BB-3E19C1444346}"/>
+              </a:ext>
+            </a:extLst>
+          </p:cNvPr>
+          <p:cNvSpPr>
+            <a:spLocks noGrp="1"/>
+          </p:cNvSpPr>
+          <p:nvPr>
+            <p:ph type="sldNum" sz="quarter" idx="7"/>
+          </p:nvPr>
+        </p:nvSpPr>
+        <p:spPr/>
+        <p:txBody>
+          <a:bodyPr/>
+          <a:lstStyle/>
+          <a:p>
+            <a:fld id="{B6F15528-21DE-4FAA-801E-634DDDAF4B2B}" type="slidenum">
+              <a:rPr lang="es-ES" smtClean="0"/>
+              <a:t>4</a:t>
+            </a:fld>
+            <a:endParaRPr lang="es-ES"/>
+          </a:p>
+        </p:txBody>
+      </p:sp>
+      <p:sp>
+        <p:nvSpPr>
+          <p:cNvPr id="6" name="Título 1">
+            <a:extLst>
+              <a:ext uri="{FF2B5EF4-FFF2-40B4-BE49-F238E27FC236}">
+                <a16:creationId xmlns:a16="http://schemas.microsoft.com/office/drawing/2014/main" id="{828EE0C9-51FD-4402-AA9B-E837CCCE382D}"/>
+              </a:ext>
+            </a:extLst>
+          </p:cNvPr>
+          <p:cNvSpPr txBox="1">
+            <a:spLocks/>
+          </p:cNvSpPr>
+          <p:nvPr/>
+        </p:nvSpPr>
+        <p:spPr>
+          <a:xfrm>
+            <a:off x="590550" y="497213"/>
+            <a:ext cx="10991850" cy="307777"/>
+          </a:xfrm>
+          <a:prstGeom prst="rect">
+            <a:avLst/>
+          </a:prstGeom>
+        </p:spPr>
+        <p:txBody>
+          <a:bodyPr wrap="square" lIns="0" tIns="0" rIns="0" bIns="0">
+            <a:spAutoFit/>
+          </a:bodyPr>
+          <a:lstStyle>
+            <a:lvl1pPr>
+              <a:defRPr sz="2000" b="1" i="0">
+                <a:solidFill>
+                  <a:schemeClr val="tx1"/>
+                </a:solidFill>
+                <a:latin typeface="Calibri"/>
+                <a:ea typeface="+mj-ea"/>
+                <a:cs typeface="Calibri"/>
+              </a:defRPr>
+            </a:lvl1pPr>
+          </a:lstStyle>
+          <a:p>
+            <a:r>
+              <a:rPr lang="es-ES" kern="0" dirty="0"/>
+              <a:t>1. </a:t>
+            </a:r>
+            <a:r>
+              <a:rPr lang="es-ES" kern="0" dirty="0" err="1"/>
+              <a:t>Balanced</a:t>
+            </a:r>
+            <a:r>
+              <a:rPr lang="es-ES" kern="0" dirty="0"/>
+              <a:t> </a:t>
+            </a:r>
+            <a:r>
+              <a:rPr lang="es-ES" kern="0" dirty="0" err="1"/>
+              <a:t>Configuration</a:t>
+            </a:r>
+            <a:endParaRPr lang="es-ES" kern="0" dirty="0"/>
+          </a:p>
+        </p:txBody>
+      </p:sp>
+      <p:pic>
+        <p:nvPicPr>
+          <p:cNvPr id="8" name="Imagen 7" descr="Gráfico&#10;&#10;El contenido generado por IA puede ser incorrecto.">
+            <a:extLst>
+              <a:ext uri="{FF2B5EF4-FFF2-40B4-BE49-F238E27FC236}">
+                <a16:creationId xmlns:a16="http://schemas.microsoft.com/office/drawing/2014/main" id="{10BC3A82-6200-F3D1-1415-E0A6EA77B38A}"/>
+              </a:ext>
+            </a:extLst>
+          </p:cNvPr>
+          <p:cNvPicPr>
+            <a:picLocks noChangeAspect="1"/>
+          </p:cNvPicPr>
+          <p:nvPr/>
+        </p:nvPicPr>
+        <p:blipFill>
+          <a:blip r:embed="rId2"/>
+          <a:stretch>
+            <a:fillRect/>
+          </a:stretch>
+        </p:blipFill>
+        <p:spPr>
+          <a:xfrm>
+            <a:off x="457200" y="778649"/>
+            <a:ext cx="3505200" cy="2812815"/>
+          </a:xfrm>
+          <a:prstGeom prst="rect">
+            <a:avLst/>
+          </a:prstGeom>
+        </p:spPr>
+      </p:pic>
+      <p:sp>
+        <p:nvSpPr>
+          <p:cNvPr id="9" name="Título 1">
+            <a:extLst>
+              <a:ext uri="{FF2B5EF4-FFF2-40B4-BE49-F238E27FC236}">
+                <a16:creationId xmlns:a16="http://schemas.microsoft.com/office/drawing/2014/main" id="{E2D6BC0E-89AE-916B-D765-C9CF8CB2B57D}"/>
+              </a:ext>
+            </a:extLst>
+          </p:cNvPr>
+          <p:cNvSpPr txBox="1">
+            <a:spLocks/>
+          </p:cNvSpPr>
+          <p:nvPr/>
+        </p:nvSpPr>
+        <p:spPr>
+          <a:xfrm>
+            <a:off x="565668" y="3626745"/>
+            <a:ext cx="10991850" cy="307777"/>
+          </a:xfrm>
+          <a:prstGeom prst="rect">
+            <a:avLst/>
+          </a:prstGeom>
+        </p:spPr>
+        <p:txBody>
+          <a:bodyPr wrap="square" lIns="0" tIns="0" rIns="0" bIns="0">
+            <a:spAutoFit/>
+          </a:bodyPr>
+          <a:lstStyle>
+            <a:lvl1pPr>
+              <a:defRPr sz="2000" b="1" i="0">
+                <a:solidFill>
+                  <a:schemeClr val="tx1"/>
+                </a:solidFill>
+                <a:latin typeface="Calibri"/>
+                <a:ea typeface="+mj-ea"/>
+                <a:cs typeface="Calibri"/>
+              </a:defRPr>
+            </a:lvl1pPr>
+          </a:lstStyle>
+          <a:p>
+            <a:r>
+              <a:rPr lang="es-ES" kern="0" dirty="0"/>
+              <a:t>2. </a:t>
+            </a:r>
+            <a:r>
+              <a:rPr lang="es-ES" kern="0" dirty="0" err="1"/>
+              <a:t>Unbalanced</a:t>
+            </a:r>
+            <a:r>
+              <a:rPr lang="es-ES" kern="0" dirty="0"/>
+              <a:t> </a:t>
+            </a:r>
+            <a:r>
+              <a:rPr lang="es-ES" kern="0" dirty="0" err="1"/>
+              <a:t>Configuration</a:t>
+            </a:r>
+            <a:r>
+              <a:rPr lang="es-ES" kern="0" dirty="0"/>
+              <a:t> – </a:t>
+            </a:r>
+            <a:r>
+              <a:rPr lang="es-ES" kern="0" dirty="0" err="1"/>
+              <a:t>Phase</a:t>
+            </a:r>
+            <a:r>
+              <a:rPr lang="es-ES" kern="0" dirty="0"/>
+              <a:t> </a:t>
+            </a:r>
+            <a:r>
+              <a:rPr lang="es-ES" kern="0" dirty="0" err="1"/>
+              <a:t>Difference</a:t>
+            </a:r>
+            <a:endParaRPr lang="es-ES" kern="0" dirty="0"/>
+          </a:p>
+        </p:txBody>
+      </p:sp>
+      <p:pic>
+        <p:nvPicPr>
+          <p:cNvPr id="11" name="Imagen 10" descr="Gráfico, Gráfico de líneas&#10;&#10;El contenido generado por IA puede ser incorrecto.">
+            <a:extLst>
+              <a:ext uri="{FF2B5EF4-FFF2-40B4-BE49-F238E27FC236}">
+                <a16:creationId xmlns:a16="http://schemas.microsoft.com/office/drawing/2014/main" id="{E13DD631-9FC7-CF67-0351-3D19444C5791}"/>
+              </a:ext>
+            </a:extLst>
+          </p:cNvPr>
+          <p:cNvPicPr>
+            <a:picLocks noChangeAspect="1"/>
+          </p:cNvPicPr>
+          <p:nvPr/>
+        </p:nvPicPr>
+        <p:blipFill>
+          <a:blip r:embed="rId3"/>
+          <a:stretch>
+            <a:fillRect/>
+          </a:stretch>
+        </p:blipFill>
+        <p:spPr>
+          <a:xfrm>
+            <a:off x="304800" y="3934522"/>
+            <a:ext cx="3657600" cy="2889251"/>
+          </a:xfrm>
+          <a:prstGeom prst="rect">
+            <a:avLst/>
+          </a:prstGeom>
+        </p:spPr>
+      </p:pic>
+    </p:spTree>
+    <p:extLst>
+      <p:ext uri="{BB962C8B-B14F-4D97-AF65-F5344CB8AC3E}">
+        <p14:creationId xmlns:p14="http://schemas.microsoft.com/office/powerpoint/2010/main" val="1453711250"/>
+      </p:ext>
+    </p:extLst>
+  </p:cSld>
+  <p:clrMapOvr>
+    <a:masterClrMapping/>
+  </p:clrMapOvr>
+</p:sld>
+</file>
+
+<file path=ppt/slides/slide5.xml><?xml version="1.0" encoding="utf-8"?>
+<p:sld xmlns:a="http://schemas.openxmlformats.org/drawingml/2006/main" xmlns:r="http://schemas.openxmlformats.org/officeDocument/2006/relationships" xmlns:p="http://schemas.openxmlformats.org/presentationml/2006/main">
+  <p:cSld>
+    <p:spTree>
+      <p:nvGrpSpPr>
+        <p:cNvPr id="1" name="">
+          <a:extLst>
+            <a:ext uri="{FF2B5EF4-FFF2-40B4-BE49-F238E27FC236}">
+              <a16:creationId xmlns:a16="http://schemas.microsoft.com/office/drawing/2014/main" id="{1E7B788F-0428-B8FC-27CF-612E7A93847E}"/>
+            </a:ext>
+          </a:extLst>
+        </p:cNvPr>
+        <p:cNvGrpSpPr/>
+        <p:nvPr/>
+      </p:nvGrpSpPr>
+      <p:grpSpPr>
+        <a:xfrm>
+          <a:off x="0" y="0"/>
+          <a:ext cx="0" cy="0"/>
+          <a:chOff x="0" y="0"/>
+          <a:chExt cx="0" cy="0"/>
+        </a:xfrm>
+      </p:grpSpPr>
+      <p:sp>
+        <p:nvSpPr>
+          <p:cNvPr id="2" name="Título 1">
+            <a:extLst>
+              <a:ext uri="{FF2B5EF4-FFF2-40B4-BE49-F238E27FC236}">
+                <a16:creationId xmlns:a16="http://schemas.microsoft.com/office/drawing/2014/main" id="{A82E0126-221F-4999-D59E-3A0112A6B5E9}"/>
+              </a:ext>
+            </a:extLst>
+          </p:cNvPr>
+          <p:cNvSpPr>
+            <a:spLocks noGrp="1"/>
+          </p:cNvSpPr>
+          <p:nvPr>
+            <p:ph type="title"/>
+          </p:nvPr>
+        </p:nvSpPr>
+        <p:spPr/>
+        <p:txBody>
+          <a:bodyPr/>
+          <a:lstStyle/>
+          <a:p>
+            <a:r>
+              <a:rPr lang="es-ES" dirty="0"/>
+              <a:t>RESULTADOS ASSESSMENT 1</a:t>
+            </a:r>
+          </a:p>
+        </p:txBody>
+      </p:sp>
+      <p:sp>
+        <p:nvSpPr>
+          <p:cNvPr id="3" name="Marcador de texto 2">
+            <a:extLst>
+              <a:ext uri="{FF2B5EF4-FFF2-40B4-BE49-F238E27FC236}">
+                <a16:creationId xmlns:a16="http://schemas.microsoft.com/office/drawing/2014/main" id="{55585A50-DD0D-0A5F-AE83-873EA45306F9}"/>
+              </a:ext>
+            </a:extLst>
+          </p:cNvPr>
+          <p:cNvSpPr>
+            <a:spLocks noGrp="1"/>
+          </p:cNvSpPr>
+          <p:nvPr>
+            <p:ph type="body" idx="1"/>
+          </p:nvPr>
+        </p:nvSpPr>
+        <p:spPr>
+          <a:xfrm>
+            <a:off x="4267200" y="1003118"/>
+            <a:ext cx="7010400" cy="184666"/>
+          </a:xfrm>
+        </p:spPr>
+        <p:txBody>
+          <a:bodyPr/>
+          <a:lstStyle/>
+          <a:p>
+            <a:r>
+              <a:rPr lang="es-ES" sz="1200" dirty="0"/>
+              <a:t>He cambiado los índices efectivos en este caso hemos pasado de SOI a SIN con aire …</a:t>
+            </a:r>
+          </a:p>
+        </p:txBody>
+      </p:sp>
+      <p:sp>
+        <p:nvSpPr>
+          <p:cNvPr id="4" name="Marcador de pie de página 3">
+            <a:extLst>
+              <a:ext uri="{FF2B5EF4-FFF2-40B4-BE49-F238E27FC236}">
+                <a16:creationId xmlns:a16="http://schemas.microsoft.com/office/drawing/2014/main" id="{05319472-C994-5F68-A053-96EAD16877F7}"/>
+              </a:ext>
+            </a:extLst>
+          </p:cNvPr>
+          <p:cNvSpPr>
+            <a:spLocks noGrp="1"/>
+          </p:cNvSpPr>
+          <p:nvPr>
+            <p:ph type="ftr" sz="quarter" idx="5"/>
+          </p:nvPr>
+        </p:nvSpPr>
+        <p:spPr/>
+        <p:txBody>
+          <a:bodyPr/>
+          <a:lstStyle/>
+          <a:p>
+            <a:pPr marL="12700">
+              <a:spcBef>
+                <a:spcPts val="15"/>
+              </a:spcBef>
+            </a:pPr>
+            <a:r>
+              <a:rPr lang="es-ES" spc="-5"/>
+              <a:t>LAB 3. INTERFEROMETERS I</a:t>
+            </a:r>
+            <a:endParaRPr lang="es-ES" spc="-5" dirty="0"/>
+          </a:p>
+        </p:txBody>
+      </p:sp>
+      <p:sp>
+        <p:nvSpPr>
+          <p:cNvPr id="5" name="Marcador de número de diapositiva 4">
+            <a:extLst>
+              <a:ext uri="{FF2B5EF4-FFF2-40B4-BE49-F238E27FC236}">
+                <a16:creationId xmlns:a16="http://schemas.microsoft.com/office/drawing/2014/main" id="{A15C0111-4B25-7624-1BD6-5055B1B0E10A}"/>
+              </a:ext>
+            </a:extLst>
+          </p:cNvPr>
+          <p:cNvSpPr>
+            <a:spLocks noGrp="1"/>
+          </p:cNvSpPr>
+          <p:nvPr>
+            <p:ph type="sldNum" sz="quarter" idx="7"/>
+          </p:nvPr>
+        </p:nvSpPr>
+        <p:spPr/>
+        <p:txBody>
+          <a:bodyPr/>
+          <a:lstStyle/>
+          <a:p>
+            <a:fld id="{B6F15528-21DE-4FAA-801E-634DDDAF4B2B}" type="slidenum">
+              <a:rPr lang="es-ES" smtClean="0"/>
+              <a:t>5</a:t>
+            </a:fld>
+            <a:endParaRPr lang="es-ES"/>
+          </a:p>
+        </p:txBody>
+      </p:sp>
+      <p:sp>
+        <p:nvSpPr>
+          <p:cNvPr id="6" name="Título 1">
+            <a:extLst>
+              <a:ext uri="{FF2B5EF4-FFF2-40B4-BE49-F238E27FC236}">
+                <a16:creationId xmlns:a16="http://schemas.microsoft.com/office/drawing/2014/main" id="{C971B12A-7795-2D76-9EC8-A21BD3E51A66}"/>
+              </a:ext>
+            </a:extLst>
+          </p:cNvPr>
+          <p:cNvSpPr txBox="1">
+            <a:spLocks/>
+          </p:cNvSpPr>
+          <p:nvPr/>
+        </p:nvSpPr>
+        <p:spPr>
+          <a:xfrm>
+            <a:off x="590550" y="497213"/>
+            <a:ext cx="10991850" cy="307777"/>
+          </a:xfrm>
+          <a:prstGeom prst="rect">
+            <a:avLst/>
+          </a:prstGeom>
+        </p:spPr>
+        <p:txBody>
+          <a:bodyPr wrap="square" lIns="0" tIns="0" rIns="0" bIns="0">
+            <a:spAutoFit/>
+          </a:bodyPr>
+          <a:lstStyle>
+            <a:lvl1pPr>
+              <a:defRPr sz="2000" b="1" i="0">
+                <a:solidFill>
+                  <a:schemeClr val="tx1"/>
+                </a:solidFill>
+                <a:latin typeface="Calibri"/>
+                <a:ea typeface="+mj-ea"/>
+                <a:cs typeface="Calibri"/>
+              </a:defRPr>
+            </a:lvl1pPr>
+          </a:lstStyle>
+          <a:p>
+            <a:r>
+              <a:rPr lang="es-ES" kern="0" dirty="0"/>
+              <a:t>3. </a:t>
+            </a:r>
+            <a:r>
+              <a:rPr lang="es-ES" kern="0" dirty="0" err="1"/>
+              <a:t>Unbalanced</a:t>
+            </a:r>
+            <a:r>
+              <a:rPr lang="es-ES" kern="0" dirty="0"/>
+              <a:t> </a:t>
+            </a:r>
+            <a:r>
+              <a:rPr lang="es-ES" kern="0" dirty="0" err="1"/>
+              <a:t>Configuration</a:t>
+            </a:r>
+            <a:r>
+              <a:rPr lang="es-ES" kern="0" dirty="0"/>
+              <a:t> – </a:t>
+            </a:r>
+            <a:r>
+              <a:rPr lang="es-ES" kern="0" dirty="0" err="1"/>
+              <a:t>Delay</a:t>
+            </a:r>
+            <a:r>
+              <a:rPr lang="es-ES" kern="0" dirty="0"/>
+              <a:t> </a:t>
+            </a:r>
+            <a:r>
+              <a:rPr lang="es-ES" kern="0" dirty="0" err="1"/>
+              <a:t>Umbalance</a:t>
+            </a:r>
+            <a:endParaRPr lang="es-ES" kern="0" dirty="0"/>
+          </a:p>
+        </p:txBody>
+      </p:sp>
+      <p:pic>
+        <p:nvPicPr>
+          <p:cNvPr id="10" name="Imagen 9" descr="Gráfico, Gráfico de líneas&#10;&#10;El contenido generado por IA puede ser incorrecto.">
+            <a:extLst>
+              <a:ext uri="{FF2B5EF4-FFF2-40B4-BE49-F238E27FC236}">
+                <a16:creationId xmlns:a16="http://schemas.microsoft.com/office/drawing/2014/main" id="{AE047732-046D-8C17-E8C0-B3597C72242D}"/>
+              </a:ext>
+            </a:extLst>
+          </p:cNvPr>
+          <p:cNvPicPr>
+            <a:picLocks noChangeAspect="1"/>
+          </p:cNvPicPr>
+          <p:nvPr/>
+        </p:nvPicPr>
+        <p:blipFill>
+          <a:blip r:embed="rId2"/>
+          <a:stretch>
+            <a:fillRect/>
+          </a:stretch>
+        </p:blipFill>
+        <p:spPr>
+          <a:xfrm>
+            <a:off x="304800" y="1187784"/>
+            <a:ext cx="4504518" cy="3614737"/>
+          </a:xfrm>
+          <a:prstGeom prst="rect">
+            <a:avLst/>
+          </a:prstGeom>
+        </p:spPr>
+      </p:pic>
+    </p:spTree>
+    <p:extLst>
+      <p:ext uri="{BB962C8B-B14F-4D97-AF65-F5344CB8AC3E}">
+        <p14:creationId xmlns:p14="http://schemas.microsoft.com/office/powerpoint/2010/main" val="2576391365"/>
+      </p:ext>
+    </p:extLst>
+  </p:cSld>
+  <p:clrMapOvr>
+    <a:masterClrMapping/>
+  </p:clrMapOvr>
+</p:sld>
+</file>
+
+<file path=ppt/slides/slide6.xml><?xml version="1.0" encoding="utf-8"?>
+<p:sld xmlns:a="http://schemas.openxmlformats.org/drawingml/2006/main" xmlns:r="http://schemas.openxmlformats.org/officeDocument/2006/relationships" xmlns:p="http://schemas.openxmlformats.org/presentationml/2006/main">
+  <p:cSld>
+    <p:spTree>
+      <p:nvGrpSpPr>
         <p:cNvPr id="1" name="">
           <a:extLst>
             <a:ext uri="{FF2B5EF4-FFF2-40B4-BE49-F238E27FC236}">
@@ -5082,7 +5854,7 @@
           <a:p>
             <a:fld id="{B6F15528-21DE-4FAA-801E-634DDDAF4B2B}" type="slidenum">
               <a:rPr lang="es-ES" smtClean="0"/>
-              <a:t>4</a:t>
+              <a:t>6</a:t>
             </a:fld>
             <a:endParaRPr lang="es-ES"/>
           </a:p>
@@ -5403,8 +6175,8 @@
         </p:nvSpPr>
         <p:spPr>
           <a:xfrm>
-            <a:off x="609441" y="4860334"/>
-            <a:ext cx="11199971" cy="1384995"/>
+            <a:off x="615789" y="3352800"/>
+            <a:ext cx="6547012" cy="2400657"/>
           </a:xfrm>
           <a:prstGeom prst="rect">
             <a:avLst/>
@@ -5443,29 +6215,242 @@
             </a:endParaRPr>
           </a:p>
           <a:p>
-            <a:pPr algn="just"/>
-            <a:endParaRPr lang="en-US" sz="1200" dirty="0">
+            <a:r>
+              <a:rPr lang="es-ES" sz="1600" dirty="0">
+                <a:solidFill>
+                  <a:schemeClr val="tx2"/>
+                </a:solidFill>
+              </a:rPr>
+              <a:t>lambda0 = 1.55  # </a:t>
+            </a:r>
+            <a:r>
+              <a:rPr lang="es-ES" sz="1600" dirty="0" err="1">
+                <a:solidFill>
+                  <a:schemeClr val="tx2"/>
+                </a:solidFill>
+              </a:rPr>
+              <a:t>um</a:t>
+            </a:r>
+            <a:endParaRPr lang="es-ES" sz="1600" dirty="0">
+              <a:solidFill>
+                <a:schemeClr val="tx2"/>
+              </a:solidFill>
+            </a:endParaRPr>
+          </a:p>
+          <a:p>
+            <a:r>
+              <a:rPr lang="es-ES" sz="1600" dirty="0">
+                <a:solidFill>
+                  <a:schemeClr val="tx2"/>
+                </a:solidFill>
+              </a:rPr>
+              <a:t>FSR = 0.04      # </a:t>
+            </a:r>
+            <a:r>
+              <a:rPr lang="es-ES" sz="1600" dirty="0" err="1">
+                <a:solidFill>
+                  <a:schemeClr val="tx2"/>
+                </a:solidFill>
+              </a:rPr>
+              <a:t>um</a:t>
+            </a:r>
+            <a:r>
+              <a:rPr lang="es-ES" sz="1600" dirty="0">
+                <a:solidFill>
+                  <a:schemeClr val="tx2"/>
+                </a:solidFill>
+              </a:rPr>
+              <a:t> (40 nm)</a:t>
+            </a:r>
+          </a:p>
+          <a:p>
+            <a:r>
+              <a:rPr lang="es-ES" sz="1600" dirty="0" err="1">
+                <a:solidFill>
+                  <a:schemeClr val="tx2"/>
+                </a:solidFill>
+              </a:rPr>
+              <a:t>neff_central</a:t>
+            </a:r>
+            <a:r>
+              <a:rPr lang="es-ES" sz="1600" dirty="0">
+                <a:solidFill>
+                  <a:schemeClr val="tx2"/>
+                </a:solidFill>
+              </a:rPr>
+              <a:t> = </a:t>
+            </a:r>
+            <a:r>
+              <a:rPr lang="es-ES" sz="1600" dirty="0" err="1">
+                <a:solidFill>
+                  <a:schemeClr val="tx2"/>
+                </a:solidFill>
+              </a:rPr>
+              <a:t>np.interp</a:t>
+            </a:r>
+            <a:r>
+              <a:rPr lang="es-ES" sz="1600" dirty="0">
+                <a:solidFill>
+                  <a:schemeClr val="tx2"/>
+                </a:solidFill>
+              </a:rPr>
+              <a:t>(lambda0, SOI[:, 0], SOI[:, 3]) </a:t>
+            </a:r>
+          </a:p>
+          <a:p>
+            <a:r>
+              <a:rPr lang="es-ES" sz="1600" dirty="0" err="1">
+                <a:solidFill>
+                  <a:schemeClr val="tx2"/>
+                </a:solidFill>
+              </a:rPr>
+              <a:t>delta_L</a:t>
+            </a:r>
+            <a:r>
+              <a:rPr lang="es-ES" sz="1600" dirty="0">
+                <a:solidFill>
+                  <a:schemeClr val="tx2"/>
+                </a:solidFill>
+              </a:rPr>
+              <a:t> = lambda0**2 / (</a:t>
+            </a:r>
+            <a:r>
+              <a:rPr lang="es-ES" sz="1600" dirty="0" err="1">
+                <a:solidFill>
+                  <a:schemeClr val="tx2"/>
+                </a:solidFill>
+              </a:rPr>
+              <a:t>neff_central</a:t>
+            </a:r>
+            <a:r>
+              <a:rPr lang="es-ES" sz="1600" dirty="0">
+                <a:solidFill>
+                  <a:schemeClr val="tx2"/>
+                </a:solidFill>
+              </a:rPr>
+              <a:t> * FSR)</a:t>
+            </a:r>
+          </a:p>
+          <a:p>
+            <a:r>
+              <a:rPr lang="es-ES" sz="1600" dirty="0" err="1">
+                <a:solidFill>
+                  <a:schemeClr val="tx2"/>
+                </a:solidFill>
+              </a:rPr>
+              <a:t>print</a:t>
+            </a:r>
+            <a:r>
+              <a:rPr lang="es-ES" sz="1600" dirty="0">
+                <a:solidFill>
+                  <a:schemeClr val="tx2"/>
+                </a:solidFill>
+              </a:rPr>
+              <a:t>(</a:t>
+            </a:r>
+            <a:r>
+              <a:rPr lang="es-ES" sz="1600" dirty="0" err="1">
+                <a:solidFill>
+                  <a:schemeClr val="tx2"/>
+                </a:solidFill>
+              </a:rPr>
+              <a:t>f"Distancia</a:t>
+            </a:r>
+            <a:r>
+              <a:rPr lang="es-ES" sz="1600" dirty="0">
+                <a:solidFill>
+                  <a:schemeClr val="tx2"/>
+                </a:solidFill>
+              </a:rPr>
+              <a:t> necesaria de </a:t>
+            </a:r>
+            <a:r>
+              <a:rPr lang="el-GR" sz="1600" dirty="0">
+                <a:solidFill>
+                  <a:schemeClr val="tx2"/>
+                </a:solidFill>
+              </a:rPr>
+              <a:t>Δ</a:t>
+            </a:r>
+            <a:r>
+              <a:rPr lang="es-ES" sz="1600" dirty="0">
+                <a:solidFill>
+                  <a:schemeClr val="tx2"/>
+                </a:solidFill>
+              </a:rPr>
+              <a:t>L para FSR=40nm: {</a:t>
+            </a:r>
+            <a:r>
+              <a:rPr lang="es-ES" sz="1600" dirty="0" err="1">
+                <a:solidFill>
+                  <a:schemeClr val="tx2"/>
+                </a:solidFill>
+              </a:rPr>
+              <a:t>delta_L</a:t>
+            </a:r>
+            <a:r>
+              <a:rPr lang="es-ES" sz="1600" dirty="0">
+                <a:solidFill>
+                  <a:schemeClr val="tx2"/>
+                </a:solidFill>
+              </a:rPr>
+              <a:t>} </a:t>
+            </a:r>
+            <a:r>
+              <a:rPr lang="es-ES" sz="1600" dirty="0" err="1">
+                <a:solidFill>
+                  <a:schemeClr val="tx2"/>
+                </a:solidFill>
+              </a:rPr>
+              <a:t>um</a:t>
+            </a:r>
+            <a:r>
+              <a:rPr lang="es-ES" sz="1600" dirty="0">
+                <a:solidFill>
+                  <a:schemeClr val="tx2"/>
+                </a:solidFill>
+              </a:rPr>
+              <a:t>")</a:t>
+            </a:r>
+          </a:p>
+          <a:p>
+            <a:endParaRPr lang="es-ES" sz="1600" dirty="0">
+              <a:solidFill>
+                <a:schemeClr val="tx2"/>
+              </a:solidFill>
               <a:latin typeface="Arial" panose="020B0604020202020204" pitchFamily="34" charset="0"/>
               <a:cs typeface="Arial" panose="020B0604020202020204" pitchFamily="34" charset="0"/>
             </a:endParaRPr>
           </a:p>
           <a:p>
-            <a:pPr algn="just"/>
-            <a:endParaRPr lang="en-US" sz="1200" dirty="0">
-              <a:latin typeface="Arial" panose="020B0604020202020204" pitchFamily="34" charset="0"/>
-              <a:cs typeface="Arial" panose="020B0604020202020204" pitchFamily="34" charset="0"/>
-            </a:endParaRPr>
-          </a:p>
-          <a:p>
-            <a:pPr algn="just"/>
-            <a:endParaRPr lang="en-US" sz="1200" dirty="0">
-              <a:latin typeface="Arial" panose="020B0604020202020204" pitchFamily="34" charset="0"/>
-              <a:cs typeface="Arial" panose="020B0604020202020204" pitchFamily="34" charset="0"/>
-            </a:endParaRPr>
-          </a:p>
-          <a:p>
-            <a:pPr algn="just"/>
-            <a:endParaRPr lang="en-US" sz="1200" dirty="0">
+            <a:r>
+              <a:rPr lang="pt-BR" sz="1600" dirty="0">
+                <a:solidFill>
+                  <a:srgbClr val="C00000"/>
+                </a:solidFill>
+              </a:rPr>
+              <a:t>Distancia </a:t>
+            </a:r>
+            <a:r>
+              <a:rPr lang="pt-BR" sz="1600" dirty="0" err="1">
+                <a:solidFill>
+                  <a:srgbClr val="C00000"/>
+                </a:solidFill>
+              </a:rPr>
+              <a:t>necesaria</a:t>
+            </a:r>
+            <a:r>
+              <a:rPr lang="pt-BR" sz="1600" dirty="0">
+                <a:solidFill>
+                  <a:srgbClr val="C00000"/>
+                </a:solidFill>
+              </a:rPr>
+              <a:t> de ΔL para FSR=40nm: 25.495910042151824 um</a:t>
+            </a:r>
+            <a:endParaRPr lang="en-US" sz="1050" dirty="0">
+              <a:solidFill>
+                <a:srgbClr val="C00000"/>
+              </a:solidFill>
               <a:latin typeface="Arial" panose="020B0604020202020204" pitchFamily="34" charset="0"/>
               <a:cs typeface="Arial" panose="020B0604020202020204" pitchFamily="34" charset="0"/>
             </a:endParaRPr>
@@ -5518,6 +6503,36 @@
           </a:p>
         </p:txBody>
       </p:sp>
+      <p:pic>
+        <p:nvPicPr>
+          <p:cNvPr id="6" name="Imagen 5" descr="Gráfico, Gráfico de líneas&#10;&#10;El contenido generado por IA puede ser incorrecto.">
+            <a:extLst>
+              <a:ext uri="{FF2B5EF4-FFF2-40B4-BE49-F238E27FC236}">
+                <a16:creationId xmlns:a16="http://schemas.microsoft.com/office/drawing/2014/main" id="{F7FC0E06-904D-ACA2-F8CF-0864E0BBD075}"/>
+              </a:ext>
+            </a:extLst>
+          </p:cNvPr>
+          <p:cNvPicPr>
+            <a:picLocks noChangeAspect="1"/>
+          </p:cNvPicPr>
+          <p:nvPr/>
+        </p:nvPicPr>
+        <p:blipFill>
+          <a:blip r:embed="rId7"/>
+          <a:stretch>
+            <a:fillRect/>
+          </a:stretch>
+        </p:blipFill>
+        <p:spPr>
+          <a:xfrm>
+            <a:off x="7646649" y="3197789"/>
+            <a:ext cx="3807932" cy="3055748"/>
+          </a:xfrm>
+          <a:prstGeom prst="rect">
+            <a:avLst/>
+          </a:prstGeom>
+        </p:spPr>
+      </p:pic>
     </p:spTree>
     <p:extLst>
       <p:ext uri="{BB962C8B-B14F-4D97-AF65-F5344CB8AC3E}">
@@ -5531,7 +6546,7 @@
 </p:sld>
 </file>
 
-<file path=ppt/slides/slide5.xml><?xml version="1.0" encoding="utf-8"?>
+<file path=ppt/slides/slide7.xml><?xml version="1.0" encoding="utf-8"?>
 <p:sld xmlns:a="http://schemas.openxmlformats.org/drawingml/2006/main" xmlns:r="http://schemas.openxmlformats.org/officeDocument/2006/relationships" xmlns:p="http://schemas.openxmlformats.org/presentationml/2006/main">
   <p:cSld>
     <p:spTree>
@@ -5673,7 +6688,7 @@
           <a:p>
             <a:fld id="{B6F15528-21DE-4FAA-801E-634DDDAF4B2B}" type="slidenum">
               <a:rPr lang="es-ES" smtClean="0"/>
-              <a:t>5</a:t>
+              <a:t>7</a:t>
             </a:fld>
             <a:endParaRPr lang="es-ES"/>
           </a:p>
@@ -6259,7 +7274,248 @@
 </p:sld>
 </file>
 
-<file path=ppt/slides/slide6.xml><?xml version="1.0" encoding="utf-8"?>
+<file path=ppt/slides/slide8.xml><?xml version="1.0" encoding="utf-8"?>
+<p:sld xmlns:a="http://schemas.openxmlformats.org/drawingml/2006/main" xmlns:r="http://schemas.openxmlformats.org/officeDocument/2006/relationships" xmlns:p="http://schemas.openxmlformats.org/presentationml/2006/main">
+  <p:cSld>
+    <p:spTree>
+      <p:nvGrpSpPr>
+        <p:cNvPr id="1" name=""/>
+        <p:cNvGrpSpPr/>
+        <p:nvPr/>
+      </p:nvGrpSpPr>
+      <p:grpSpPr>
+        <a:xfrm>
+          <a:off x="0" y="0"/>
+          <a:ext cx="0" cy="0"/>
+          <a:chOff x="0" y="0"/>
+          <a:chExt cx="0" cy="0"/>
+        </a:xfrm>
+      </p:grpSpPr>
+      <p:sp>
+        <p:nvSpPr>
+          <p:cNvPr id="2" name="Título 1">
+            <a:extLst>
+              <a:ext uri="{FF2B5EF4-FFF2-40B4-BE49-F238E27FC236}">
+                <a16:creationId xmlns:a16="http://schemas.microsoft.com/office/drawing/2014/main" id="{F023557B-4A53-1289-E90C-6DB7C97DECAA}"/>
+              </a:ext>
+            </a:extLst>
+          </p:cNvPr>
+          <p:cNvSpPr>
+            <a:spLocks noGrp="1"/>
+          </p:cNvSpPr>
+          <p:nvPr>
+            <p:ph type="title"/>
+          </p:nvPr>
+        </p:nvSpPr>
+        <p:spPr/>
+        <p:txBody>
+          <a:bodyPr/>
+          <a:lstStyle/>
+          <a:p>
+            <a:r>
+              <a:rPr lang="es-ES" dirty="0"/>
+              <a:t>RESULTADO ASSESSMENT 3</a:t>
+            </a:r>
+          </a:p>
+        </p:txBody>
+      </p:sp>
+      <p:sp>
+        <p:nvSpPr>
+          <p:cNvPr id="3" name="Marcador de texto 2">
+            <a:extLst>
+              <a:ext uri="{FF2B5EF4-FFF2-40B4-BE49-F238E27FC236}">
+                <a16:creationId xmlns:a16="http://schemas.microsoft.com/office/drawing/2014/main" id="{4110DCF2-ADFB-9C9C-3B05-114FD4667AF8}"/>
+              </a:ext>
+            </a:extLst>
+          </p:cNvPr>
+          <p:cNvSpPr>
+            <a:spLocks noGrp="1"/>
+          </p:cNvSpPr>
+          <p:nvPr>
+            <p:ph type="body" idx="1"/>
+          </p:nvPr>
+        </p:nvSpPr>
+        <p:spPr>
+          <a:xfrm>
+            <a:off x="5562600" y="3657600"/>
+            <a:ext cx="6210552" cy="2993648"/>
+          </a:xfrm>
+        </p:spPr>
+        <p:txBody>
+          <a:bodyPr/>
+          <a:lstStyle/>
+          <a:p>
+            <a:endParaRPr lang="es-ES" dirty="0"/>
+          </a:p>
+        </p:txBody>
+      </p:sp>
+      <p:sp>
+        <p:nvSpPr>
+          <p:cNvPr id="4" name="Marcador de pie de página 3">
+            <a:extLst>
+              <a:ext uri="{FF2B5EF4-FFF2-40B4-BE49-F238E27FC236}">
+                <a16:creationId xmlns:a16="http://schemas.microsoft.com/office/drawing/2014/main" id="{D7450D25-12E4-707F-C74B-5DD97197EAEF}"/>
+              </a:ext>
+            </a:extLst>
+          </p:cNvPr>
+          <p:cNvSpPr>
+            <a:spLocks noGrp="1"/>
+          </p:cNvSpPr>
+          <p:nvPr>
+            <p:ph type="ftr" sz="quarter" idx="5"/>
+          </p:nvPr>
+        </p:nvSpPr>
+        <p:spPr/>
+        <p:txBody>
+          <a:bodyPr/>
+          <a:lstStyle/>
+          <a:p>
+            <a:pPr marL="12700">
+              <a:spcBef>
+                <a:spcPts val="15"/>
+              </a:spcBef>
+            </a:pPr>
+            <a:r>
+              <a:rPr lang="es-ES" spc="-5"/>
+              <a:t>LAB 3. INTERFEROMETERS I</a:t>
+            </a:r>
+            <a:endParaRPr lang="es-ES" spc="-5" dirty="0"/>
+          </a:p>
+        </p:txBody>
+      </p:sp>
+      <p:sp>
+        <p:nvSpPr>
+          <p:cNvPr id="5" name="Marcador de número de diapositiva 4">
+            <a:extLst>
+              <a:ext uri="{FF2B5EF4-FFF2-40B4-BE49-F238E27FC236}">
+                <a16:creationId xmlns:a16="http://schemas.microsoft.com/office/drawing/2014/main" id="{EA19DD35-F68B-5DB2-B523-F3DD8B1DF7C5}"/>
+              </a:ext>
+            </a:extLst>
+          </p:cNvPr>
+          <p:cNvSpPr>
+            <a:spLocks noGrp="1"/>
+          </p:cNvSpPr>
+          <p:nvPr>
+            <p:ph type="sldNum" sz="quarter" idx="7"/>
+          </p:nvPr>
+        </p:nvSpPr>
+        <p:spPr/>
+        <p:txBody>
+          <a:bodyPr/>
+          <a:lstStyle/>
+          <a:p>
+            <a:fld id="{B6F15528-21DE-4FAA-801E-634DDDAF4B2B}" type="slidenum">
+              <a:rPr lang="es-ES" smtClean="0"/>
+              <a:t>8</a:t>
+            </a:fld>
+            <a:endParaRPr lang="es-ES"/>
+          </a:p>
+        </p:txBody>
+      </p:sp>
+      <p:pic>
+        <p:nvPicPr>
+          <p:cNvPr id="7" name="Imagen 6" descr="Gráfico&#10;&#10;El contenido generado por IA puede ser incorrecto.">
+            <a:extLst>
+              <a:ext uri="{FF2B5EF4-FFF2-40B4-BE49-F238E27FC236}">
+                <a16:creationId xmlns:a16="http://schemas.microsoft.com/office/drawing/2014/main" id="{970C693C-397E-C05E-341A-475268AA5ED2}"/>
+              </a:ext>
+            </a:extLst>
+          </p:cNvPr>
+          <p:cNvPicPr>
+            <a:picLocks noChangeAspect="1"/>
+          </p:cNvPicPr>
+          <p:nvPr/>
+        </p:nvPicPr>
+        <p:blipFill>
+          <a:blip r:embed="rId2"/>
+          <a:stretch>
+            <a:fillRect/>
+          </a:stretch>
+        </p:blipFill>
+        <p:spPr>
+          <a:xfrm>
+            <a:off x="4191000" y="541146"/>
+            <a:ext cx="3733800" cy="2996259"/>
+          </a:xfrm>
+          <a:prstGeom prst="rect">
+            <a:avLst/>
+          </a:prstGeom>
+        </p:spPr>
+      </p:pic>
+      <p:pic>
+        <p:nvPicPr>
+          <p:cNvPr id="8" name="Imagen 7" descr="Gráfico&#10;&#10;El contenido generado por IA puede ser incorrecto.">
+            <a:extLst>
+              <a:ext uri="{FF2B5EF4-FFF2-40B4-BE49-F238E27FC236}">
+                <a16:creationId xmlns:a16="http://schemas.microsoft.com/office/drawing/2014/main" id="{88550AFA-4D98-680F-D7F6-469FB55B884D}"/>
+              </a:ext>
+            </a:extLst>
+          </p:cNvPr>
+          <p:cNvPicPr>
+            <a:picLocks noChangeAspect="1"/>
+          </p:cNvPicPr>
+          <p:nvPr/>
+        </p:nvPicPr>
+        <p:blipFill>
+          <a:blip r:embed="rId3"/>
+          <a:stretch>
+            <a:fillRect/>
+          </a:stretch>
+        </p:blipFill>
+        <p:spPr>
+          <a:xfrm>
+            <a:off x="390856" y="541146"/>
+            <a:ext cx="3627780" cy="2911181"/>
+          </a:xfrm>
+          <a:prstGeom prst="rect">
+            <a:avLst/>
+          </a:prstGeom>
+        </p:spPr>
+      </p:pic>
+      <p:pic>
+        <p:nvPicPr>
+          <p:cNvPr id="10" name="Imagen 9" descr="Texto&#10;&#10;El contenido generado por IA puede ser incorrecto.">
+            <a:extLst>
+              <a:ext uri="{FF2B5EF4-FFF2-40B4-BE49-F238E27FC236}">
+                <a16:creationId xmlns:a16="http://schemas.microsoft.com/office/drawing/2014/main" id="{93F7BF7B-4A45-0658-0202-5D90ED7F058D}"/>
+              </a:ext>
+            </a:extLst>
+          </p:cNvPr>
+          <p:cNvPicPr>
+            <a:picLocks noChangeAspect="1"/>
+          </p:cNvPicPr>
+          <p:nvPr/>
+        </p:nvPicPr>
+        <p:blipFill>
+          <a:blip r:embed="rId4"/>
+          <a:stretch>
+            <a:fillRect/>
+          </a:stretch>
+        </p:blipFill>
+        <p:spPr>
+          <a:xfrm>
+            <a:off x="418848" y="3478944"/>
+            <a:ext cx="4829508" cy="3276930"/>
+          </a:xfrm>
+          <a:prstGeom prst="rect">
+            <a:avLst/>
+          </a:prstGeom>
+        </p:spPr>
+      </p:pic>
+    </p:spTree>
+    <p:extLst>
+      <p:ext uri="{BB962C8B-B14F-4D97-AF65-F5344CB8AC3E}">
+        <p14:creationId xmlns:p14="http://schemas.microsoft.com/office/powerpoint/2010/main" val="3804435833"/>
+      </p:ext>
+    </p:extLst>
+  </p:cSld>
+  <p:clrMapOvr>
+    <a:masterClrMapping/>
+  </p:clrMapOvr>
+</p:sld>
+</file>
+
+<file path=ppt/slides/slide9.xml><?xml version="1.0" encoding="utf-8"?>
 <p:sld xmlns:a="http://schemas.openxmlformats.org/drawingml/2006/main" xmlns:r="http://schemas.openxmlformats.org/officeDocument/2006/relationships" xmlns:p="http://schemas.openxmlformats.org/presentationml/2006/main">
   <p:cSld>
     <p:spTree>
@@ -6391,7 +7647,7 @@
           <a:p>
             <a:fld id="{B6F15528-21DE-4FAA-801E-634DDDAF4B2B}" type="slidenum">
               <a:rPr lang="es-ES" smtClean="0"/>
-              <a:t>6</a:t>
+              <a:t>9</a:t>
             </a:fld>
             <a:endParaRPr lang="es-ES"/>
           </a:p>
@@ -6681,159 +7937,6 @@
         <p14:creationId xmlns:p14="http://schemas.microsoft.com/office/powerpoint/2010/main" val="3660438245"/>
       </p:ext>
     </p:extLst>
-  </p:cSld>
-  <p:clrMapOvr>
-    <a:masterClrMapping/>
-  </p:clrMapOvr>
-</p:sld>
-</file>
-
-<file path=ppt/slides/slide7.xml><?xml version="1.0" encoding="utf-8"?>
-<p:sld xmlns:a="http://schemas.openxmlformats.org/drawingml/2006/main" xmlns:r="http://schemas.openxmlformats.org/officeDocument/2006/relationships" xmlns:p="http://schemas.openxmlformats.org/presentationml/2006/main">
-  <p:cSld>
-    <p:spTree>
-      <p:nvGrpSpPr>
-        <p:cNvPr id="1" name=""/>
-        <p:cNvGrpSpPr/>
-        <p:nvPr/>
-      </p:nvGrpSpPr>
-      <p:grpSpPr>
-        <a:xfrm>
-          <a:off x="0" y="0"/>
-          <a:ext cx="0" cy="0"/>
-          <a:chOff x="0" y="0"/>
-          <a:chExt cx="0" cy="0"/>
-        </a:xfrm>
-      </p:grpSpPr>
-      <p:sp>
-        <p:nvSpPr>
-          <p:cNvPr id="3" name="object 3"/>
-          <p:cNvSpPr/>
-          <p:nvPr/>
-        </p:nvSpPr>
-        <p:spPr>
-          <a:xfrm>
-            <a:off x="3945635" y="2636520"/>
-            <a:ext cx="8246363" cy="1584959"/>
-          </a:xfrm>
-          <a:prstGeom prst="rect">
-            <a:avLst/>
-          </a:prstGeom>
-          <a:blipFill>
-            <a:blip r:embed="rId2" cstate="print"/>
-            <a:stretch>
-              <a:fillRect/>
-            </a:stretch>
-          </a:blipFill>
-        </p:spPr>
-        <p:txBody>
-          <a:bodyPr wrap="square" lIns="0" tIns="0" rIns="0" bIns="0" rtlCol="0"/>
-          <a:lstStyle/>
-          <a:p>
-            <a:endParaRPr/>
-          </a:p>
-        </p:txBody>
-      </p:sp>
-      <p:sp>
-        <p:nvSpPr>
-          <p:cNvPr id="4" name="object 4"/>
-          <p:cNvSpPr txBox="1">
-            <a:spLocks noGrp="1"/>
-          </p:cNvSpPr>
-          <p:nvPr>
-            <p:ph type="title"/>
-          </p:nvPr>
-        </p:nvSpPr>
-        <p:spPr>
-          <a:xfrm>
-            <a:off x="4513326" y="3165729"/>
-            <a:ext cx="2233295" cy="513715"/>
-          </a:xfrm>
-          <a:prstGeom prst="rect">
-            <a:avLst/>
-          </a:prstGeom>
-        </p:spPr>
-        <p:txBody>
-          <a:bodyPr vert="horz" wrap="square" lIns="0" tIns="13335" rIns="0" bIns="0" rtlCol="0">
-            <a:spAutoFit/>
-          </a:bodyPr>
-          <a:lstStyle/>
-          <a:p>
-            <a:pPr marL="12700">
-              <a:lnSpc>
-                <a:spcPct val="100000"/>
-              </a:lnSpc>
-              <a:spcBef>
-                <a:spcPts val="105"/>
-              </a:spcBef>
-            </a:pPr>
-            <a:r>
-              <a:rPr sz="3200" b="1" spc="-5" dirty="0">
-                <a:solidFill>
-                  <a:srgbClr val="FFFFFF"/>
-                </a:solidFill>
-                <a:latin typeface="Lucida Sans"/>
-                <a:cs typeface="Lucida Sans"/>
-              </a:rPr>
-              <a:t>Thank</a:t>
-            </a:r>
-            <a:r>
-              <a:rPr sz="3200" b="1" spc="-55" dirty="0">
-                <a:solidFill>
-                  <a:srgbClr val="FFFFFF"/>
-                </a:solidFill>
-                <a:latin typeface="Lucida Sans"/>
-                <a:cs typeface="Lucida Sans"/>
-              </a:rPr>
-              <a:t> </a:t>
-            </a:r>
-            <a:r>
-              <a:rPr sz="3200" b="1" dirty="0">
-                <a:solidFill>
-                  <a:srgbClr val="FFFFFF"/>
-                </a:solidFill>
-                <a:latin typeface="Lucida Sans"/>
-                <a:cs typeface="Lucida Sans"/>
-              </a:rPr>
-              <a:t>you</a:t>
-            </a:r>
-            <a:endParaRPr sz="3200">
-              <a:latin typeface="Lucida Sans"/>
-              <a:cs typeface="Lucida Sans"/>
-            </a:endParaRPr>
-          </a:p>
-        </p:txBody>
-      </p:sp>
-      <p:sp>
-        <p:nvSpPr>
-          <p:cNvPr id="5" name="Marcador de número de diapositiva 4">
-            <a:extLst>
-              <a:ext uri="{FF2B5EF4-FFF2-40B4-BE49-F238E27FC236}">
-                <a16:creationId xmlns:a16="http://schemas.microsoft.com/office/drawing/2014/main" id="{B052DA19-AD24-7D24-2AE9-51F8F5A7F5E0}"/>
-              </a:ext>
-            </a:extLst>
-          </p:cNvPr>
-          <p:cNvSpPr>
-            <a:spLocks noGrp="1"/>
-          </p:cNvSpPr>
-          <p:nvPr>
-            <p:ph type="sldNum" sz="quarter" idx="7"/>
-          </p:nvPr>
-        </p:nvSpPr>
-        <p:spPr/>
-        <p:txBody>
-          <a:bodyPr/>
-          <a:lstStyle/>
-          <a:p>
-            <a:fld id="{B6F15528-21DE-4FAA-801E-634DDDAF4B2B}" type="slidenum">
-              <a:rPr lang="es-ES" smtClean="0"/>
-              <a:t>7</a:t>
-            </a:fld>
-            <a:endParaRPr lang="es-ES"/>
-          </a:p>
-        </p:txBody>
-      </p:sp>
-    </p:spTree>
   </p:cSld>
   <p:clrMapOvr>
     <a:masterClrMapping/>

--- a/LabBook_3.pptx
+++ b/LabBook_3.pptx
@@ -235,7 +235,7 @@
           <a:p>
             <a:fld id="{8438F8DC-35B0-48E6-A86E-42F1F08DD00F}" type="datetimeFigureOut">
               <a:rPr lang="es-ES" smtClean="0"/>
-              <a:t>02/03/2026</a:t>
+              <a:t>09/03/2026</a:t>
             </a:fld>
             <a:endParaRPr lang="es-ES"/>
           </a:p>
@@ -412,7 +412,7 @@
           <a:p>
             <a:fld id="{FACBDC12-F39B-4B97-8F4D-6734F9D366FF}" type="datetimeFigureOut">
               <a:rPr lang="es-ES" smtClean="0"/>
-              <a:t>02/03/2026</a:t>
+              <a:t>09/03/2026</a:t>
             </a:fld>
             <a:endParaRPr lang="es-ES"/>
           </a:p>
@@ -5070,39 +5070,6 @@
       </p:sp>
       <p:sp>
         <p:nvSpPr>
-          <p:cNvPr id="3" name="Marcador de texto 2">
-            <a:extLst>
-              <a:ext uri="{FF2B5EF4-FFF2-40B4-BE49-F238E27FC236}">
-                <a16:creationId xmlns:a16="http://schemas.microsoft.com/office/drawing/2014/main" id="{00664E0F-23D2-7384-575D-BFFE4699F858}"/>
-              </a:ext>
-            </a:extLst>
-          </p:cNvPr>
-          <p:cNvSpPr>
-            <a:spLocks noGrp="1"/>
-          </p:cNvSpPr>
-          <p:nvPr>
-            <p:ph type="body" idx="1"/>
-          </p:nvPr>
-        </p:nvSpPr>
-        <p:spPr>
-          <a:xfrm>
-            <a:off x="4254759" y="4171057"/>
-            <a:ext cx="7010400" cy="184666"/>
-          </a:xfrm>
-        </p:spPr>
-        <p:txBody>
-          <a:bodyPr/>
-          <a:lstStyle/>
-          <a:p>
-            <a:r>
-              <a:rPr lang="es-ES" sz="1200" dirty="0"/>
-              <a:t>He cambiado los índices efectivos en este caso hemos pasado de SOI a SIN con aire …</a:t>
-            </a:r>
-          </a:p>
-        </p:txBody>
-      </p:sp>
-      <p:sp>
-        <p:nvSpPr>
           <p:cNvPr id="4" name="Marcador de pie de página 3">
             <a:extLst>
               <a:ext uri="{FF2B5EF4-FFF2-40B4-BE49-F238E27FC236}">
@@ -5180,7 +5147,7 @@
         </p:nvSpPr>
         <p:spPr>
           <a:xfrm>
-            <a:off x="590550" y="497213"/>
+            <a:off x="565668" y="580768"/>
             <a:ext cx="10991850" cy="307777"/>
           </a:xfrm>
           <a:prstGeom prst="rect">
@@ -5246,8 +5213,8 @@
         </p:blipFill>
         <p:spPr>
           <a:xfrm>
-            <a:off x="457200" y="778649"/>
-            <a:ext cx="3505200" cy="2812815"/>
+            <a:off x="392231" y="950934"/>
+            <a:ext cx="3334472" cy="2675811"/>
           </a:xfrm>
           <a:prstGeom prst="rect">
             <a:avLst/>
@@ -5270,7 +5237,7 @@
         </p:nvSpPr>
         <p:spPr>
           <a:xfrm>
-            <a:off x="565668" y="3626745"/>
+            <a:off x="565668" y="3727453"/>
             <a:ext cx="10991850" cy="307777"/>
           </a:xfrm>
           <a:prstGeom prst="rect">
@@ -5332,10 +5299,10 @@
       </p:sp>
       <p:pic>
         <p:nvPicPr>
-          <p:cNvPr id="11" name="Imagen 10" descr="Gráfico, Gráfico de líneas&#10;&#10;El contenido generado por IA puede ser incorrecto.">
+          <p:cNvPr id="10" name="Imagen 9">
             <a:extLst>
               <a:ext uri="{FF2B5EF4-FFF2-40B4-BE49-F238E27FC236}">
-                <a16:creationId xmlns:a16="http://schemas.microsoft.com/office/drawing/2014/main" id="{E13DD631-9FC7-CF67-0351-3D19444C5791}"/>
+                <a16:creationId xmlns:a16="http://schemas.microsoft.com/office/drawing/2014/main" id="{A7AAE93E-289B-5836-D779-D7506E544C8E}"/>
               </a:ext>
             </a:extLst>
           </p:cNvPr>
@@ -5352,14 +5319,158 @@
         </p:blipFill>
         <p:spPr>
           <a:xfrm>
-            <a:off x="304800" y="3934522"/>
-            <a:ext cx="3657600" cy="2889251"/>
+            <a:off x="372015" y="4045185"/>
+            <a:ext cx="3560838" cy="2812815"/>
           </a:xfrm>
           <a:prstGeom prst="rect">
             <a:avLst/>
           </a:prstGeom>
         </p:spPr>
       </p:pic>
+      <p:sp>
+        <p:nvSpPr>
+          <p:cNvPr id="13" name="CuadroTexto 12">
+            <a:extLst>
+              <a:ext uri="{FF2B5EF4-FFF2-40B4-BE49-F238E27FC236}">
+                <a16:creationId xmlns:a16="http://schemas.microsoft.com/office/drawing/2014/main" id="{BE95D7DA-0E11-AA8B-923C-B3D69C295455}"/>
+              </a:ext>
+            </a:extLst>
+          </p:cNvPr>
+          <p:cNvSpPr txBox="1"/>
+          <p:nvPr/>
+        </p:nvSpPr>
+        <p:spPr>
+          <a:xfrm>
+            <a:off x="3965510" y="1169152"/>
+            <a:ext cx="7899629" cy="2062103"/>
+          </a:xfrm>
+          <a:prstGeom prst="rect">
+            <a:avLst/>
+          </a:prstGeom>
+          <a:noFill/>
+        </p:spPr>
+        <p:txBody>
+          <a:bodyPr wrap="square">
+            <a:spAutoFit/>
+          </a:bodyPr>
+          <a:lstStyle/>
+          <a:p>
+            <a:pPr algn="just"/>
+            <a:r>
+              <a:rPr lang="es-ES" sz="1600" dirty="0"/>
+              <a:t>Se observa una respuesta espectral completamente plana. Al usar mismas longitudes (Lu = 25 </a:t>
+            </a:r>
+            <a:r>
+              <a:rPr lang="es-ES" sz="1600" dirty="0" err="1"/>
+              <a:t>um</a:t>
+            </a:r>
+            <a:r>
+              <a:rPr lang="es-ES" sz="1600" dirty="0"/>
+              <a:t> y </a:t>
+            </a:r>
+            <a:r>
+              <a:rPr lang="es-ES" sz="1600" dirty="0" err="1"/>
+              <a:t>Ld</a:t>
+            </a:r>
+            <a:r>
+              <a:rPr lang="es-ES" sz="1600" dirty="0"/>
+              <a:t> = 25 </a:t>
+            </a:r>
+            <a:r>
+              <a:rPr lang="es-ES" sz="1600" dirty="0" err="1"/>
+              <a:t>um</a:t>
+            </a:r>
+            <a:r>
+              <a:rPr lang="es-ES" sz="1600" dirty="0"/>
+              <a:t>) y el mismo índice efectivo del SOI para ambos brazos del interferómetro, la diferencia de fase generada es nula para todas las longitudes de onda simuladas. Al ser un escenario ideal sin pérdidas de propagación y sin pérdidas por exceso de acopladores (</a:t>
+            </a:r>
+            <a:r>
+              <a:rPr lang="es-ES" sz="1600" dirty="0" err="1"/>
+              <a:t>alpha</a:t>
+            </a:r>
+            <a:r>
+              <a:rPr lang="es-ES" sz="1600" dirty="0"/>
+              <a:t>=0 y gamma=0), y asumiendo divisores ideales al 50%, la amplitud máxima de transmisión alcanza un valor de 1. En consecuencia, toda la potencia óptica interfiere de manera constante a lo largo de todo el espectro, resultando en un FSR infinito al no existir ninguna oscilación o dependencia con la longitud de onda.</a:t>
+            </a:r>
+          </a:p>
+        </p:txBody>
+      </p:sp>
+      <p:sp>
+        <p:nvSpPr>
+          <p:cNvPr id="15" name="CuadroTexto 14">
+            <a:extLst>
+              <a:ext uri="{FF2B5EF4-FFF2-40B4-BE49-F238E27FC236}">
+                <a16:creationId xmlns:a16="http://schemas.microsoft.com/office/drawing/2014/main" id="{9C2DA9CC-A6BF-8644-0980-52DE978AE002}"/>
+              </a:ext>
+            </a:extLst>
+          </p:cNvPr>
+          <p:cNvSpPr txBox="1"/>
+          <p:nvPr/>
+        </p:nvSpPr>
+        <p:spPr>
+          <a:xfrm>
+            <a:off x="4002054" y="4288389"/>
+            <a:ext cx="7826539" cy="2062103"/>
+          </a:xfrm>
+          <a:prstGeom prst="rect">
+            <a:avLst/>
+          </a:prstGeom>
+          <a:noFill/>
+        </p:spPr>
+        <p:txBody>
+          <a:bodyPr wrap="square">
+            <a:spAutoFit/>
+          </a:bodyPr>
+          <a:lstStyle/>
+          <a:p>
+            <a:pPr algn="just"/>
+            <a:r>
+              <a:rPr lang="es-ES" sz="1600" dirty="0"/>
+              <a:t>Para un desbalance por diferencia de fase , se mantiene (Lu = 25 </a:t>
+            </a:r>
+            <a:r>
+              <a:rPr lang="es-ES" sz="1600" dirty="0" err="1"/>
+              <a:t>um</a:t>
+            </a:r>
+            <a:r>
+              <a:rPr lang="es-ES" sz="1600" dirty="0"/>
+              <a:t> y </a:t>
+            </a:r>
+            <a:r>
+              <a:rPr lang="es-ES" sz="1600" dirty="0" err="1"/>
+              <a:t>Ld</a:t>
+            </a:r>
+            <a:r>
+              <a:rPr lang="es-ES" sz="1600" dirty="0"/>
+              <a:t> = 25 </a:t>
+            </a:r>
+            <a:r>
+              <a:rPr lang="es-ES" sz="1600" dirty="0" err="1"/>
+              <a:t>um</a:t>
+            </a:r>
+            <a:r>
+              <a:rPr lang="es-ES" sz="1600" dirty="0"/>
+              <a:t>), pero se cambia el índice efectivo con diferentes entornos para las guías de nitruro de silicio (</a:t>
+            </a:r>
+            <a:r>
+              <a:rPr lang="es-ES" sz="1600" dirty="0" err="1"/>
+              <a:t>SiN</a:t>
+            </a:r>
+            <a:r>
+              <a:rPr lang="es-ES" sz="1600" dirty="0"/>
+              <a:t>), usando recubrimiento para un brazo y dejándolo expuesto al aire para el otro. Esta asimetría de materiales provoca que la luz viaje a velocidades ligeramente distintas en cada camino, acumulando un desfase gradual. Debido a que el contraste del índice efectivo entre el recubrimiento y el aire produce un cambio pequeño, el espectro resultante muestra un FSR extremadamente grande, lo que solo permite visualizar una fracción muy leve de la curva de interferencia dentro de la ventana de simulación de 1.50 a 1.60 </a:t>
+            </a:r>
+            <a:r>
+              <a:rPr lang="es-ES" sz="1600" dirty="0" err="1"/>
+              <a:t>um</a:t>
+            </a:r>
+            <a:r>
+              <a:rPr lang="es-ES" sz="1600" dirty="0"/>
+              <a:t>.</a:t>
+            </a:r>
+          </a:p>
+        </p:txBody>
+      </p:sp>
     </p:spTree>
     <p:extLst>
       <p:ext uri="{BB962C8B-B14F-4D97-AF65-F5344CB8AC3E}">
@@ -5426,39 +5537,6 @@
       </p:sp>
       <p:sp>
         <p:nvSpPr>
-          <p:cNvPr id="3" name="Marcador de texto 2">
-            <a:extLst>
-              <a:ext uri="{FF2B5EF4-FFF2-40B4-BE49-F238E27FC236}">
-                <a16:creationId xmlns:a16="http://schemas.microsoft.com/office/drawing/2014/main" id="{55585A50-DD0D-0A5F-AE83-873EA45306F9}"/>
-              </a:ext>
-            </a:extLst>
-          </p:cNvPr>
-          <p:cNvSpPr>
-            <a:spLocks noGrp="1"/>
-          </p:cNvSpPr>
-          <p:nvPr>
-            <p:ph type="body" idx="1"/>
-          </p:nvPr>
-        </p:nvSpPr>
-        <p:spPr>
-          <a:xfrm>
-            <a:off x="4267200" y="1003118"/>
-            <a:ext cx="7010400" cy="184666"/>
-          </a:xfrm>
-        </p:spPr>
-        <p:txBody>
-          <a:bodyPr/>
-          <a:lstStyle/>
-          <a:p>
-            <a:r>
-              <a:rPr lang="es-ES" sz="1200" dirty="0"/>
-              <a:t>He cambiado los índices efectivos en este caso hemos pasado de SOI a SIN con aire …</a:t>
-            </a:r>
-          </a:p>
-        </p:txBody>
-      </p:sp>
-      <p:sp>
-        <p:nvSpPr>
           <p:cNvPr id="4" name="Marcador de pie de página 3">
             <a:extLst>
               <a:ext uri="{FF2B5EF4-FFF2-40B4-BE49-F238E27FC236}">
@@ -5536,7 +5614,7 @@
         </p:nvSpPr>
         <p:spPr>
           <a:xfrm>
-            <a:off x="590550" y="497213"/>
+            <a:off x="609600" y="687189"/>
             <a:ext cx="10991850" cy="307777"/>
           </a:xfrm>
           <a:prstGeom prst="rect">
@@ -5598,10 +5676,10 @@
       </p:sp>
       <p:pic>
         <p:nvPicPr>
-          <p:cNvPr id="10" name="Imagen 9" descr="Gráfico, Gráfico de líneas&#10;&#10;El contenido generado por IA puede ser incorrecto.">
+          <p:cNvPr id="8" name="Imagen 7">
             <a:extLst>
               <a:ext uri="{FF2B5EF4-FFF2-40B4-BE49-F238E27FC236}">
-                <a16:creationId xmlns:a16="http://schemas.microsoft.com/office/drawing/2014/main" id="{AE047732-046D-8C17-E8C0-B3597C72242D}"/>
+                <a16:creationId xmlns:a16="http://schemas.microsoft.com/office/drawing/2014/main" id="{C4CE3470-D6EA-D1DE-A975-A1E79690E074}"/>
               </a:ext>
             </a:extLst>
           </p:cNvPr>
@@ -5618,14 +5696,106 @@
         </p:blipFill>
         <p:spPr>
           <a:xfrm>
-            <a:off x="304800" y="1187784"/>
-            <a:ext cx="4504518" cy="3614737"/>
+            <a:off x="457200" y="1186287"/>
+            <a:ext cx="3703478" cy="2971927"/>
           </a:xfrm>
           <a:prstGeom prst="rect">
             <a:avLst/>
           </a:prstGeom>
         </p:spPr>
       </p:pic>
+      <p:sp>
+        <p:nvSpPr>
+          <p:cNvPr id="13" name="CuadroTexto 12">
+            <a:extLst>
+              <a:ext uri="{FF2B5EF4-FFF2-40B4-BE49-F238E27FC236}">
+                <a16:creationId xmlns:a16="http://schemas.microsoft.com/office/drawing/2014/main" id="{050610C9-D74B-FFEA-4330-607EDD607E2F}"/>
+              </a:ext>
+            </a:extLst>
+          </p:cNvPr>
+          <p:cNvSpPr txBox="1"/>
+          <p:nvPr/>
+        </p:nvSpPr>
+        <p:spPr>
+          <a:xfrm>
+            <a:off x="4206163" y="1524000"/>
+            <a:ext cx="7650322" cy="2062103"/>
+          </a:xfrm>
+          <a:prstGeom prst="rect">
+            <a:avLst/>
+          </a:prstGeom>
+          <a:noFill/>
+        </p:spPr>
+        <p:txBody>
+          <a:bodyPr wrap="square">
+            <a:spAutoFit/>
+          </a:bodyPr>
+          <a:lstStyle/>
+          <a:p>
+            <a:pPr algn="just"/>
+            <a:r>
+              <a:rPr lang="es-ES" sz="1600" dirty="0"/>
+              <a:t>En la configuración desbalanceada por retardo, volvemos con el material SOI idéntico para ambos caminos, pero hacemos las guías </a:t>
+            </a:r>
+            <a:r>
+              <a:rPr lang="es-ES" sz="1600" dirty="0" err="1"/>
+              <a:t>asimetricas</a:t>
+            </a:r>
+            <a:r>
+              <a:rPr lang="es-ES" sz="1600" dirty="0"/>
+              <a:t> (Lu = 25 </a:t>
+            </a:r>
+            <a:r>
+              <a:rPr lang="es-ES" sz="1600" dirty="0" err="1"/>
+              <a:t>um</a:t>
+            </a:r>
+            <a:r>
+              <a:rPr lang="es-ES" sz="1600" dirty="0"/>
+              <a:t> frente a </a:t>
+            </a:r>
+            <a:r>
+              <a:rPr lang="es-ES" sz="1600" dirty="0" err="1"/>
+              <a:t>Ld</a:t>
+            </a:r>
+            <a:r>
+              <a:rPr lang="es-ES" sz="1600" dirty="0"/>
+              <a:t> = 5 </a:t>
+            </a:r>
+            <a:r>
+              <a:rPr lang="es-ES" sz="1600" dirty="0" err="1"/>
+              <a:t>um</a:t>
+            </a:r>
+            <a:r>
+              <a:rPr lang="es-ES" sz="1600" dirty="0"/>
+              <a:t>). Esta diferencia de camino óptico fuerza a las ondas a recombinarse en el segundo acoplador con un desfase fuertemente dependiente de la longitud de onda. El resultado visual es de un filtro </a:t>
+            </a:r>
+            <a:r>
+              <a:rPr lang="es-ES" sz="1600" dirty="0" err="1"/>
+              <a:t>interferométrico</a:t>
+            </a:r>
+            <a:r>
+              <a:rPr lang="es-ES" sz="1600" dirty="0"/>
+              <a:t>, mostrando un patrón de franjas senoidales periódicas muy bien definidas. Gracias a la ausencia total de pérdidas (</a:t>
+            </a:r>
+            <a:r>
+              <a:rPr lang="es-ES" sz="1600" i="1" dirty="0" err="1"/>
+              <a:t>alpha</a:t>
+            </a:r>
+            <a:r>
+              <a:rPr lang="es-ES" sz="1600" dirty="0"/>
+              <a:t> = 0, </a:t>
+            </a:r>
+            <a:r>
+              <a:rPr lang="es-ES" sz="1600" i="1" dirty="0"/>
+              <a:t>gamma</a:t>
+            </a:r>
+            <a:r>
+              <a:rPr lang="es-ES" sz="1600" dirty="0"/>
+              <a:t> = 0) y al uso de acopladores perfectamente balanceados al 50%, la amplitud de las oscilaciones van de 0 a 1, definiendo así un FSR finito y fácilmente medible.</a:t>
+            </a:r>
+          </a:p>
+        </p:txBody>
+      </p:sp>
     </p:spTree>
     <p:extLst>
       <p:ext uri="{BB962C8B-B14F-4D97-AF65-F5344CB8AC3E}">
@@ -6176,7 +6346,7 @@
         <p:spPr>
           <a:xfrm>
             <a:off x="615789" y="3352800"/>
-            <a:ext cx="6547012" cy="2400657"/>
+            <a:ext cx="6547012" cy="461665"/>
           </a:xfrm>
           <a:prstGeom prst="rect">
             <a:avLst/>
@@ -6214,254 +6384,6 @@
               <a:cs typeface="Arial" panose="020B0604020202020204" pitchFamily="34" charset="0"/>
             </a:endParaRPr>
           </a:p>
-          <a:p>
-            <a:r>
-              <a:rPr lang="es-ES" sz="1600" dirty="0">
-                <a:solidFill>
-                  <a:schemeClr val="tx2"/>
-                </a:solidFill>
-              </a:rPr>
-              <a:t>lambda0 = 1.55  # </a:t>
-            </a:r>
-            <a:r>
-              <a:rPr lang="es-ES" sz="1600" dirty="0" err="1">
-                <a:solidFill>
-                  <a:schemeClr val="tx2"/>
-                </a:solidFill>
-              </a:rPr>
-              <a:t>um</a:t>
-            </a:r>
-            <a:endParaRPr lang="es-ES" sz="1600" dirty="0">
-              <a:solidFill>
-                <a:schemeClr val="tx2"/>
-              </a:solidFill>
-            </a:endParaRPr>
-          </a:p>
-          <a:p>
-            <a:r>
-              <a:rPr lang="es-ES" sz="1600" dirty="0">
-                <a:solidFill>
-                  <a:schemeClr val="tx2"/>
-                </a:solidFill>
-              </a:rPr>
-              <a:t>FSR = 0.04      # </a:t>
-            </a:r>
-            <a:r>
-              <a:rPr lang="es-ES" sz="1600" dirty="0" err="1">
-                <a:solidFill>
-                  <a:schemeClr val="tx2"/>
-                </a:solidFill>
-              </a:rPr>
-              <a:t>um</a:t>
-            </a:r>
-            <a:r>
-              <a:rPr lang="es-ES" sz="1600" dirty="0">
-                <a:solidFill>
-                  <a:schemeClr val="tx2"/>
-                </a:solidFill>
-              </a:rPr>
-              <a:t> (40 nm)</a:t>
-            </a:r>
-          </a:p>
-          <a:p>
-            <a:r>
-              <a:rPr lang="es-ES" sz="1600" dirty="0" err="1">
-                <a:solidFill>
-                  <a:schemeClr val="tx2"/>
-                </a:solidFill>
-              </a:rPr>
-              <a:t>neff_central</a:t>
-            </a:r>
-            <a:r>
-              <a:rPr lang="es-ES" sz="1600" dirty="0">
-                <a:solidFill>
-                  <a:schemeClr val="tx2"/>
-                </a:solidFill>
-              </a:rPr>
-              <a:t> = </a:t>
-            </a:r>
-            <a:r>
-              <a:rPr lang="es-ES" sz="1600" dirty="0" err="1">
-                <a:solidFill>
-                  <a:schemeClr val="tx2"/>
-                </a:solidFill>
-              </a:rPr>
-              <a:t>np.interp</a:t>
-            </a:r>
-            <a:r>
-              <a:rPr lang="es-ES" sz="1600" dirty="0">
-                <a:solidFill>
-                  <a:schemeClr val="tx2"/>
-                </a:solidFill>
-              </a:rPr>
-              <a:t>(lambda0, SOI[:, 0], SOI[:, 3]) </a:t>
-            </a:r>
-          </a:p>
-          <a:p>
-            <a:r>
-              <a:rPr lang="es-ES" sz="1600" dirty="0" err="1">
-                <a:solidFill>
-                  <a:schemeClr val="tx2"/>
-                </a:solidFill>
-              </a:rPr>
-              <a:t>delta_L</a:t>
-            </a:r>
-            <a:r>
-              <a:rPr lang="es-ES" sz="1600" dirty="0">
-                <a:solidFill>
-                  <a:schemeClr val="tx2"/>
-                </a:solidFill>
-              </a:rPr>
-              <a:t> = lambda0**2 / (</a:t>
-            </a:r>
-            <a:r>
-              <a:rPr lang="es-ES" sz="1600" dirty="0" err="1">
-                <a:solidFill>
-                  <a:schemeClr val="tx2"/>
-                </a:solidFill>
-              </a:rPr>
-              <a:t>neff_central</a:t>
-            </a:r>
-            <a:r>
-              <a:rPr lang="es-ES" sz="1600" dirty="0">
-                <a:solidFill>
-                  <a:schemeClr val="tx2"/>
-                </a:solidFill>
-              </a:rPr>
-              <a:t> * FSR)</a:t>
-            </a:r>
-          </a:p>
-          <a:p>
-            <a:r>
-              <a:rPr lang="es-ES" sz="1600" dirty="0" err="1">
-                <a:solidFill>
-                  <a:schemeClr val="tx2"/>
-                </a:solidFill>
-              </a:rPr>
-              <a:t>print</a:t>
-            </a:r>
-            <a:r>
-              <a:rPr lang="es-ES" sz="1600" dirty="0">
-                <a:solidFill>
-                  <a:schemeClr val="tx2"/>
-                </a:solidFill>
-              </a:rPr>
-              <a:t>(</a:t>
-            </a:r>
-            <a:r>
-              <a:rPr lang="es-ES" sz="1600" dirty="0" err="1">
-                <a:solidFill>
-                  <a:schemeClr val="tx2"/>
-                </a:solidFill>
-              </a:rPr>
-              <a:t>f"Distancia</a:t>
-            </a:r>
-            <a:r>
-              <a:rPr lang="es-ES" sz="1600" dirty="0">
-                <a:solidFill>
-                  <a:schemeClr val="tx2"/>
-                </a:solidFill>
-              </a:rPr>
-              <a:t> necesaria de </a:t>
-            </a:r>
-            <a:r>
-              <a:rPr lang="el-GR" sz="1600" dirty="0">
-                <a:solidFill>
-                  <a:schemeClr val="tx2"/>
-                </a:solidFill>
-              </a:rPr>
-              <a:t>Δ</a:t>
-            </a:r>
-            <a:r>
-              <a:rPr lang="es-ES" sz="1600" dirty="0">
-                <a:solidFill>
-                  <a:schemeClr val="tx2"/>
-                </a:solidFill>
-              </a:rPr>
-              <a:t>L para FSR=40nm: {</a:t>
-            </a:r>
-            <a:r>
-              <a:rPr lang="es-ES" sz="1600" dirty="0" err="1">
-                <a:solidFill>
-                  <a:schemeClr val="tx2"/>
-                </a:solidFill>
-              </a:rPr>
-              <a:t>delta_L</a:t>
-            </a:r>
-            <a:r>
-              <a:rPr lang="es-ES" sz="1600" dirty="0">
-                <a:solidFill>
-                  <a:schemeClr val="tx2"/>
-                </a:solidFill>
-              </a:rPr>
-              <a:t>} </a:t>
-            </a:r>
-            <a:r>
-              <a:rPr lang="es-ES" sz="1600" dirty="0" err="1">
-                <a:solidFill>
-                  <a:schemeClr val="tx2"/>
-                </a:solidFill>
-              </a:rPr>
-              <a:t>um</a:t>
-            </a:r>
-            <a:r>
-              <a:rPr lang="es-ES" sz="1600" dirty="0">
-                <a:solidFill>
-                  <a:schemeClr val="tx2"/>
-                </a:solidFill>
-              </a:rPr>
-              <a:t>")</a:t>
-            </a:r>
-          </a:p>
-          <a:p>
-            <a:endParaRPr lang="es-ES" sz="1600" dirty="0">
-              <a:solidFill>
-                <a:schemeClr val="tx2"/>
-              </a:solidFill>
-              <a:latin typeface="Arial" panose="020B0604020202020204" pitchFamily="34" charset="0"/>
-              <a:cs typeface="Arial" panose="020B0604020202020204" pitchFamily="34" charset="0"/>
-            </a:endParaRPr>
-          </a:p>
-          <a:p>
-            <a:r>
-              <a:rPr lang="pt-BR" sz="1600" dirty="0">
-                <a:solidFill>
-                  <a:srgbClr val="C00000"/>
-                </a:solidFill>
-              </a:rPr>
-              <a:t>Distancia </a:t>
-            </a:r>
-            <a:r>
-              <a:rPr lang="pt-BR" sz="1600" dirty="0" err="1">
-                <a:solidFill>
-                  <a:srgbClr val="C00000"/>
-                </a:solidFill>
-              </a:rPr>
-              <a:t>necesaria</a:t>
-            </a:r>
-            <a:r>
-              <a:rPr lang="pt-BR" sz="1600" dirty="0">
-                <a:solidFill>
-                  <a:srgbClr val="C00000"/>
-                </a:solidFill>
-              </a:rPr>
-              <a:t> de ΔL para FSR=40nm: 25.495910042151824 um</a:t>
-            </a:r>
-            <a:endParaRPr lang="en-US" sz="1050" dirty="0">
-              <a:solidFill>
-                <a:srgbClr val="C00000"/>
-              </a:solidFill>
-              <a:latin typeface="Arial" panose="020B0604020202020204" pitchFamily="34" charset="0"/>
-              <a:cs typeface="Arial" panose="020B0604020202020204" pitchFamily="34" charset="0"/>
-            </a:endParaRPr>
-          </a:p>
-          <a:p>
-            <a:pPr algn="just"/>
-            <a:endParaRPr lang="en-US" sz="1200" dirty="0">
-              <a:latin typeface="Arial" panose="020B0604020202020204" pitchFamily="34" charset="0"/>
-              <a:cs typeface="Arial" panose="020B0604020202020204" pitchFamily="34" charset="0"/>
-            </a:endParaRPr>
-          </a:p>
         </p:txBody>
       </p:sp>
       <p:sp>
@@ -6505,10 +6427,10 @@
       </p:sp>
       <p:pic>
         <p:nvPicPr>
-          <p:cNvPr id="6" name="Imagen 5" descr="Gráfico, Gráfico de líneas&#10;&#10;El contenido generado por IA puede ser incorrecto.">
+          <p:cNvPr id="7" name="Imagen 6">
             <a:extLst>
               <a:ext uri="{FF2B5EF4-FFF2-40B4-BE49-F238E27FC236}">
-                <a16:creationId xmlns:a16="http://schemas.microsoft.com/office/drawing/2014/main" id="{F7FC0E06-904D-ACA2-F8CF-0864E0BBD075}"/>
+                <a16:creationId xmlns:a16="http://schemas.microsoft.com/office/drawing/2014/main" id="{9AA74071-27EF-9BC4-9F05-26666E76AF90}"/>
               </a:ext>
             </a:extLst>
           </p:cNvPr>
@@ -6525,14 +6447,356 @@
         </p:blipFill>
         <p:spPr>
           <a:xfrm>
-            <a:off x="7646649" y="3197789"/>
-            <a:ext cx="3807932" cy="3055748"/>
+            <a:off x="7497538" y="3034141"/>
+            <a:ext cx="4153253" cy="3332857"/>
           </a:xfrm>
           <a:prstGeom prst="rect">
             <a:avLst/>
           </a:prstGeom>
         </p:spPr>
       </p:pic>
+      <p:sp>
+        <p:nvSpPr>
+          <p:cNvPr id="9" name="Rectangle 2">
+            <a:extLst>
+              <a:ext uri="{FF2B5EF4-FFF2-40B4-BE49-F238E27FC236}">
+                <a16:creationId xmlns:a16="http://schemas.microsoft.com/office/drawing/2014/main" id="{016AD86E-7044-F629-02E0-95FD9BDD18DC}"/>
+              </a:ext>
+            </a:extLst>
+          </p:cNvPr>
+          <p:cNvSpPr>
+            <a:spLocks noChangeArrowheads="1"/>
+          </p:cNvSpPr>
+          <p:nvPr/>
+        </p:nvSpPr>
+        <p:spPr bwMode="auto">
+          <a:xfrm>
+            <a:off x="574595" y="3979269"/>
+            <a:ext cx="6629400" cy="2046714"/>
+          </a:xfrm>
+          <a:prstGeom prst="rect">
+            <a:avLst/>
+          </a:prstGeom>
+          <a:noFill/>
+          <a:ln>
+            <a:noFill/>
+          </a:ln>
+          <a:effectLst/>
+          <a:extLst>
+            <a:ext uri="{909E8E84-426E-40DD-AFC4-6F175D3DCCD1}">
+              <a14:hiddenFill xmlns:a14="http://schemas.microsoft.com/office/drawing/2010/main">
+                <a:solidFill>
+                  <a:schemeClr val="accent1"/>
+                </a:solidFill>
+              </a14:hiddenFill>
+            </a:ext>
+            <a:ext uri="{91240B29-F687-4F45-9708-019B960494DF}">
+              <a14:hiddenLine xmlns:a14="http://schemas.microsoft.com/office/drawing/2010/main" w="9525">
+                <a:solidFill>
+                  <a:schemeClr val="tx1"/>
+                </a:solidFill>
+                <a:miter lim="800000"/>
+                <a:headEnd/>
+                <a:tailEnd/>
+              </a14:hiddenLine>
+            </a:ext>
+            <a:ext uri="{AF507438-7753-43E0-B8FC-AC1667EBCBE1}">
+              <a14:hiddenEffects xmlns:a14="http://schemas.microsoft.com/office/drawing/2010/main">
+                <a:effectLst>
+                  <a:outerShdw dist="35921" dir="2700000" algn="ctr" rotWithShape="0">
+                    <a:schemeClr val="bg2"/>
+                  </a:outerShdw>
+                </a:effectLst>
+              </a14:hiddenEffects>
+            </a:ext>
+          </a:extLst>
+        </p:spPr>
+        <p:txBody>
+          <a:bodyPr vert="horz" wrap="square" lIns="91440" tIns="0" rIns="91440" bIns="45720" numCol="1" anchor="ctr" anchorCtr="0" compatLnSpc="1">
+            <a:prstTxWarp prst="textNoShape">
+              <a:avLst/>
+            </a:prstTxWarp>
+            <a:spAutoFit/>
+          </a:bodyPr>
+          <a:lstStyle/>
+          <a:p>
+            <a:pPr lvl="0" algn="just" eaLnBrk="0" fontAlgn="base" hangingPunct="0">
+              <a:spcBef>
+                <a:spcPct val="0"/>
+              </a:spcBef>
+              <a:spcAft>
+                <a:spcPct val="0"/>
+              </a:spcAft>
+            </a:pPr>
+            <a:r>
+              <a:rPr kumimoji="0" lang="es-ES" altLang="es-ES" sz="1600" b="0" i="0" u="none" strike="noStrike" cap="none" normalizeH="0" baseline="0" dirty="0">
+                <a:ln>
+                  <a:noFill/>
+                </a:ln>
+                <a:solidFill>
+                  <a:schemeClr val="tx1"/>
+                </a:solidFill>
+                <a:effectLst/>
+                <a:latin typeface="Google Sans Text"/>
+              </a:rPr>
+              <a:t>Para </a:t>
+            </a:r>
+            <a:r>
+              <a:rPr kumimoji="0" lang="es-ES" altLang="es-ES" sz="1600" b="0" u="none" strike="noStrike" cap="none" normalizeH="0" baseline="0" dirty="0">
+                <a:ln>
+                  <a:noFill/>
+                </a:ln>
+                <a:solidFill>
+                  <a:schemeClr val="tx1"/>
+                </a:solidFill>
+                <a:effectLst/>
+                <a:latin typeface="Google Sans Text"/>
+              </a:rPr>
+              <a:t>lograr un FSR de 40 </a:t>
+            </a:r>
+            <a:r>
+              <a:rPr kumimoji="0" lang="es-ES" altLang="es-ES" sz="1600" b="0" i="0" u="none" strike="noStrike" cap="none" normalizeH="0" baseline="0" dirty="0">
+                <a:ln>
+                  <a:noFill/>
+                </a:ln>
+                <a:solidFill>
+                  <a:schemeClr val="tx1"/>
+                </a:solidFill>
+                <a:effectLst/>
+                <a:latin typeface="Google Sans Text"/>
+              </a:rPr>
+              <a:t>nm a una longitud de onda de 1550 nm</a:t>
+            </a:r>
+            <a:r>
+              <a:rPr kumimoji="0" lang="es-ES" altLang="es-ES" sz="1600" b="0" i="0" u="none" strike="noStrike" cap="none" normalizeH="0" dirty="0">
+                <a:ln>
+                  <a:noFill/>
+                </a:ln>
+                <a:solidFill>
+                  <a:schemeClr val="tx1"/>
+                </a:solidFill>
+                <a:effectLst/>
+                <a:latin typeface="Google Sans Text"/>
+              </a:rPr>
+              <a:t> </a:t>
+            </a:r>
+            <a:r>
+              <a:rPr kumimoji="0" lang="es-ES" altLang="es-ES" sz="1600" b="0" i="0" u="none" strike="noStrike" cap="none" normalizeH="0" baseline="0" dirty="0">
+                <a:ln>
+                  <a:noFill/>
+                </a:ln>
+                <a:solidFill>
+                  <a:schemeClr val="tx1"/>
+                </a:solidFill>
+                <a:effectLst/>
+                <a:latin typeface="Google Sans Text"/>
+              </a:rPr>
+              <a:t>es necesario aplicar un desbalance de longitud entre los brazos del MZI. Interpolando el índice efectivo de la guía SOI a 1.55nm</a:t>
+            </a:r>
+            <a:r>
+              <a:rPr kumimoji="0" lang="es-ES" altLang="es-ES" sz="1600" b="0" i="0" u="none" strike="noStrike" cap="none" normalizeH="0" dirty="0">
+                <a:ln>
+                  <a:noFill/>
+                </a:ln>
+                <a:solidFill>
+                  <a:schemeClr val="tx1"/>
+                </a:solidFill>
+                <a:effectLst/>
+                <a:latin typeface="Google Sans Text"/>
+              </a:rPr>
+              <a:t> </a:t>
+            </a:r>
+            <a:r>
+              <a:rPr kumimoji="0" lang="es-ES" altLang="es-ES" sz="1600" b="0" i="0" u="none" strike="noStrike" cap="none" normalizeH="0" baseline="0" dirty="0">
+                <a:ln>
+                  <a:noFill/>
+                </a:ln>
+                <a:solidFill>
+                  <a:schemeClr val="tx1"/>
+                </a:solidFill>
+                <a:effectLst/>
+                <a:latin typeface="Google Sans Text"/>
+              </a:rPr>
+              <a:t>y aplicando la formula de </a:t>
+            </a:r>
+            <a:r>
+              <a:rPr kumimoji="0" lang="es-ES" altLang="es-ES" sz="1600" b="0" i="0" u="none" strike="noStrike" cap="none" normalizeH="0" baseline="0" dirty="0" err="1">
+                <a:ln>
+                  <a:noFill/>
+                </a:ln>
+                <a:solidFill>
+                  <a:schemeClr val="tx1"/>
+                </a:solidFill>
+                <a:effectLst/>
+                <a:latin typeface="Google Sans Text"/>
+              </a:rPr>
+              <a:t>delta_L</a:t>
+            </a:r>
+            <a:r>
+              <a:rPr kumimoji="0" lang="es-ES" altLang="es-ES" sz="1600" b="0" i="0" u="none" strike="noStrike" cap="none" normalizeH="0" baseline="0" dirty="0">
+                <a:ln>
+                  <a:noFill/>
+                </a:ln>
+                <a:solidFill>
+                  <a:schemeClr val="tx1"/>
+                </a:solidFill>
+                <a:effectLst/>
+                <a:latin typeface="Google Sans Text"/>
+              </a:rPr>
+              <a:t>, </a:t>
+            </a:r>
+            <a:r>
+              <a:rPr lang="es-ES" altLang="es-ES" sz="1600" dirty="0">
+                <a:latin typeface="Google Sans Text"/>
+              </a:rPr>
+              <a:t>tenemos </a:t>
+            </a:r>
+            <a:r>
+              <a:rPr kumimoji="0" lang="es-ES" altLang="es-ES" sz="1600" b="0" i="0" u="none" strike="noStrike" cap="none" normalizeH="0" baseline="0" dirty="0">
+                <a:ln>
+                  <a:noFill/>
+                </a:ln>
+                <a:solidFill>
+                  <a:schemeClr val="tx1"/>
+                </a:solidFill>
+                <a:effectLst/>
+                <a:latin typeface="Google Sans Text"/>
+              </a:rPr>
+              <a:t>que la diferencia geométrica requerida es de </a:t>
+            </a:r>
+            <a:r>
+              <a:rPr lang="es-ES" sz="1600" b="1" dirty="0">
+                <a:latin typeface="Google Sans Text"/>
+              </a:rPr>
+              <a:t>13.9899</a:t>
+            </a:r>
+            <a:r>
+              <a:rPr lang="es-ES" altLang="es-ES" sz="1600" b="1" dirty="0">
+                <a:latin typeface="Google Sans Text"/>
+              </a:rPr>
+              <a:t> nm.</a:t>
+            </a:r>
+          </a:p>
+          <a:p>
+            <a:pPr marL="0" marR="0" lvl="0" indent="0" algn="just" defTabSz="914400" rtl="0" eaLnBrk="0" fontAlgn="base" latinLnBrk="0" hangingPunct="0">
+              <a:lnSpc>
+                <a:spcPct val="100000"/>
+              </a:lnSpc>
+              <a:spcBef>
+                <a:spcPct val="0"/>
+              </a:spcBef>
+              <a:spcAft>
+                <a:spcPct val="0"/>
+              </a:spcAft>
+              <a:buClrTx/>
+              <a:buSzTx/>
+              <a:buFontTx/>
+              <a:buNone/>
+              <a:tabLst/>
+            </a:pPr>
+            <a:r>
+              <a:rPr kumimoji="0" lang="es-ES" altLang="es-ES" sz="1600" b="0" i="0" u="none" strike="noStrike" cap="none" normalizeH="0" baseline="0" dirty="0">
+                <a:ln>
+                  <a:noFill/>
+                </a:ln>
+                <a:solidFill>
+                  <a:schemeClr val="tx1"/>
+                </a:solidFill>
+                <a:effectLst/>
+                <a:latin typeface="Google Sans Text"/>
+              </a:rPr>
+              <a:t>Al simular el modelo matemático con este valor de </a:t>
+            </a:r>
+            <a:r>
+              <a:rPr kumimoji="0" lang="es-ES" altLang="es-ES" sz="1600" b="0" i="0" u="none" strike="noStrike" cap="none" normalizeH="0" baseline="0" dirty="0" err="1">
+                <a:ln>
+                  <a:noFill/>
+                </a:ln>
+                <a:solidFill>
+                  <a:schemeClr val="tx1"/>
+                </a:solidFill>
+                <a:effectLst/>
+                <a:latin typeface="Google Sans Text"/>
+              </a:rPr>
+              <a:t>delta_L</a:t>
+            </a:r>
+            <a:r>
+              <a:rPr lang="es-ES" altLang="es-ES" sz="1600" dirty="0">
+                <a:latin typeface="Google Sans Text"/>
+              </a:rPr>
+              <a:t>, </a:t>
+            </a:r>
+            <a:r>
+              <a:rPr kumimoji="0" lang="es-ES" altLang="es-ES" sz="1600" b="0" i="0" u="none" strike="noStrike" cap="none" normalizeH="0" baseline="0" dirty="0">
+                <a:ln>
+                  <a:noFill/>
+                </a:ln>
+                <a:solidFill>
+                  <a:schemeClr val="tx1"/>
+                </a:solidFill>
+                <a:effectLst/>
+                <a:latin typeface="Google Sans Text"/>
+              </a:rPr>
+              <a:t>la función de transferencia confirma el diseño. La gráfica muestra el patrón oscilatorio característico de un filtro </a:t>
+            </a:r>
+            <a:r>
+              <a:rPr kumimoji="0" lang="es-ES" altLang="es-ES" sz="1600" b="0" i="0" u="none" strike="noStrike" cap="none" normalizeH="0" baseline="0" dirty="0" err="1">
+                <a:ln>
+                  <a:noFill/>
+                </a:ln>
+                <a:solidFill>
+                  <a:schemeClr val="tx1"/>
+                </a:solidFill>
+                <a:effectLst/>
+                <a:latin typeface="Google Sans Text"/>
+              </a:rPr>
+              <a:t>interferométrico</a:t>
+            </a:r>
+            <a:r>
+              <a:rPr kumimoji="0" lang="es-ES" altLang="es-ES" sz="1600" b="0" i="0" u="none" strike="noStrike" cap="none" normalizeH="0" baseline="0" dirty="0">
+                <a:ln>
+                  <a:noFill/>
+                </a:ln>
+                <a:solidFill>
+                  <a:schemeClr val="tx1"/>
+                </a:solidFill>
+                <a:effectLst/>
+                <a:latin typeface="Google Sans Text"/>
+              </a:rPr>
+              <a:t>, donde la distancia espectral entre dos picos consecutivos de transmisión </a:t>
+            </a:r>
+            <a:r>
+              <a:rPr lang="es-ES" altLang="es-ES" sz="1600" dirty="0">
+                <a:latin typeface="Google Sans Text"/>
+              </a:rPr>
+              <a:t>es </a:t>
+            </a:r>
+            <a:r>
+              <a:rPr kumimoji="0" lang="es-ES" altLang="es-ES" sz="1600" b="0" i="0" u="none" strike="noStrike" cap="none" normalizeH="0" baseline="0" dirty="0">
+                <a:ln>
+                  <a:noFill/>
+                </a:ln>
+                <a:solidFill>
+                  <a:schemeClr val="tx1"/>
+                </a:solidFill>
+                <a:effectLst/>
+                <a:latin typeface="Google Sans Text"/>
+              </a:rPr>
+              <a:t>de 40 nm.</a:t>
+            </a:r>
+            <a:endParaRPr kumimoji="0" lang="es-ES" altLang="es-ES" sz="1600" b="0" i="0" u="none" strike="noStrike" cap="none" normalizeH="0" baseline="0" dirty="0">
+              <a:ln>
+                <a:noFill/>
+              </a:ln>
+              <a:solidFill>
+                <a:schemeClr val="tx1"/>
+              </a:solidFill>
+              <a:effectLst/>
+              <a:latin typeface="Arial" panose="020B0604020202020204" pitchFamily="34" charset="0"/>
+            </a:endParaRPr>
+          </a:p>
+        </p:txBody>
+      </p:sp>
     </p:spTree>
     <p:extLst>
       <p:ext uri="{BB962C8B-B14F-4D97-AF65-F5344CB8AC3E}">
@@ -7307,7 +7571,12 @@
             <p:ph type="title"/>
           </p:nvPr>
         </p:nvSpPr>
-        <p:spPr/>
+        <p:spPr>
+          <a:xfrm>
+            <a:off x="600075" y="316301"/>
+            <a:ext cx="10991850" cy="307777"/>
+          </a:xfrm>
+        </p:spPr>
         <p:txBody>
           <a:bodyPr/>
           <a:lstStyle/>
@@ -7316,36 +7585,6 @@
               <a:rPr lang="es-ES" dirty="0"/>
               <a:t>RESULTADO ASSESSMENT 3</a:t>
             </a:r>
-          </a:p>
-        </p:txBody>
-      </p:sp>
-      <p:sp>
-        <p:nvSpPr>
-          <p:cNvPr id="3" name="Marcador de texto 2">
-            <a:extLst>
-              <a:ext uri="{FF2B5EF4-FFF2-40B4-BE49-F238E27FC236}">
-                <a16:creationId xmlns:a16="http://schemas.microsoft.com/office/drawing/2014/main" id="{4110DCF2-ADFB-9C9C-3B05-114FD4667AF8}"/>
-              </a:ext>
-            </a:extLst>
-          </p:cNvPr>
-          <p:cNvSpPr>
-            <a:spLocks noGrp="1"/>
-          </p:cNvSpPr>
-          <p:nvPr>
-            <p:ph type="body" idx="1"/>
-          </p:nvPr>
-        </p:nvSpPr>
-        <p:spPr>
-          <a:xfrm>
-            <a:off x="5562600" y="3657600"/>
-            <a:ext cx="6210552" cy="2993648"/>
-          </a:xfrm>
-        </p:spPr>
-        <p:txBody>
-          <a:bodyPr/>
-          <a:lstStyle/>
-          <a:p>
-            <a:endParaRPr lang="es-ES" dirty="0"/>
           </a:p>
         </p:txBody>
       </p:sp>
@@ -7434,8 +7673,8 @@
         </p:blipFill>
         <p:spPr>
           <a:xfrm>
-            <a:off x="4191000" y="541146"/>
-            <a:ext cx="3733800" cy="2996259"/>
+            <a:off x="6061593" y="867430"/>
+            <a:ext cx="4216900" cy="3383932"/>
           </a:xfrm>
           <a:prstGeom prst="rect">
             <a:avLst/>
@@ -7464,44 +7703,116 @@
         </p:blipFill>
         <p:spPr>
           <a:xfrm>
-            <a:off x="390856" y="541146"/>
-            <a:ext cx="3627780" cy="2911181"/>
+            <a:off x="990600" y="847214"/>
+            <a:ext cx="4257344" cy="3416387"/>
           </a:xfrm>
           <a:prstGeom prst="rect">
             <a:avLst/>
           </a:prstGeom>
         </p:spPr>
       </p:pic>
-      <p:pic>
-        <p:nvPicPr>
-          <p:cNvPr id="10" name="Imagen 9" descr="Texto&#10;&#10;El contenido generado por IA puede ser incorrecto.">
+      <p:sp>
+        <p:nvSpPr>
+          <p:cNvPr id="9" name="Rectangle 2">
             <a:extLst>
               <a:ext uri="{FF2B5EF4-FFF2-40B4-BE49-F238E27FC236}">
-                <a16:creationId xmlns:a16="http://schemas.microsoft.com/office/drawing/2014/main" id="{93F7BF7B-4A45-0658-0202-5D90ED7F058D}"/>
+                <a16:creationId xmlns:a16="http://schemas.microsoft.com/office/drawing/2014/main" id="{6FF249A7-CAA7-725F-6587-42C3E249687C}"/>
               </a:ext>
             </a:extLst>
           </p:cNvPr>
-          <p:cNvPicPr>
-            <a:picLocks noChangeAspect="1"/>
-          </p:cNvPicPr>
+          <p:cNvSpPr>
+            <a:spLocks noChangeArrowheads="1"/>
+          </p:cNvSpPr>
           <p:nvPr/>
-        </p:nvPicPr>
-        <p:blipFill>
-          <a:blip r:embed="rId4"/>
-          <a:stretch>
-            <a:fillRect/>
-          </a:stretch>
-        </p:blipFill>
-        <p:spPr>
+        </p:nvSpPr>
+        <p:spPr bwMode="auto">
           <a:xfrm>
-            <a:off x="418848" y="3478944"/>
-            <a:ext cx="4829508" cy="3276930"/>
+            <a:off x="381000" y="4441126"/>
+            <a:ext cx="11125200" cy="1569660"/>
           </a:xfrm>
           <a:prstGeom prst="rect">
             <a:avLst/>
           </a:prstGeom>
+          <a:noFill/>
+          <a:ln>
+            <a:noFill/>
+          </a:ln>
+          <a:effectLst/>
+          <a:extLst>
+            <a:ext uri="{909E8E84-426E-40DD-AFC4-6F175D3DCCD1}">
+              <a14:hiddenFill xmlns:a14="http://schemas.microsoft.com/office/drawing/2010/main">
+                <a:solidFill>
+                  <a:schemeClr val="accent1"/>
+                </a:solidFill>
+              </a14:hiddenFill>
+            </a:ext>
+            <a:ext uri="{91240B29-F687-4F45-9708-019B960494DF}">
+              <a14:hiddenLine xmlns:a14="http://schemas.microsoft.com/office/drawing/2010/main" w="9525">
+                <a:solidFill>
+                  <a:schemeClr val="tx1"/>
+                </a:solidFill>
+                <a:miter lim="800000"/>
+                <a:headEnd/>
+                <a:tailEnd/>
+              </a14:hiddenLine>
+            </a:ext>
+            <a:ext uri="{AF507438-7753-43E0-B8FC-AC1667EBCBE1}">
+              <a14:hiddenEffects xmlns:a14="http://schemas.microsoft.com/office/drawing/2010/main">
+                <a:effectLst>
+                  <a:outerShdw dist="35921" dir="2700000" algn="ctr" rotWithShape="0">
+                    <a:schemeClr val="bg2"/>
+                  </a:outerShdw>
+                </a:effectLst>
+              </a14:hiddenEffects>
+            </a:ext>
+          </a:extLst>
         </p:spPr>
-      </p:pic>
+        <p:txBody>
+          <a:bodyPr vert="horz" wrap="square" lIns="91440" tIns="45720" rIns="91440" bIns="45720" numCol="1" anchor="ctr" anchorCtr="0" compatLnSpc="1">
+            <a:prstTxWarp prst="textNoShape">
+              <a:avLst/>
+            </a:prstTxWarp>
+            <a:spAutoFit/>
+          </a:bodyPr>
+          <a:lstStyle/>
+          <a:p>
+            <a:pPr marR="0" indent="0" algn="just" eaLnBrk="0" fontAlgn="base" hangingPunct="0">
+              <a:lnSpc>
+                <a:spcPct val="100000"/>
+              </a:lnSpc>
+              <a:spcBef>
+                <a:spcPct val="0"/>
+              </a:spcBef>
+              <a:spcAft>
+                <a:spcPct val="0"/>
+              </a:spcAft>
+              <a:buClrTx/>
+              <a:buSzTx/>
+              <a:buFontTx/>
+              <a:buNone/>
+              <a:tabLst/>
+            </a:pPr>
+            <a:r>
+              <a:rPr lang="es-ES" altLang="es-ES" sz="1600" dirty="0">
+                <a:latin typeface="Google Sans Text"/>
+              </a:rPr>
+              <a:t>Se ha establecido una configuración completamente balanceada, usando el mismo material (SOI) y la misma longitud geométrica (Lu=25um y </a:t>
+            </a:r>
+            <a:r>
+              <a:rPr lang="es-ES" altLang="es-ES" sz="1600" dirty="0" err="1">
+                <a:latin typeface="Google Sans Text"/>
+              </a:rPr>
+              <a:t>Ld</a:t>
+            </a:r>
+            <a:r>
+              <a:rPr lang="es-ES" altLang="es-ES" sz="1600" dirty="0">
+                <a:latin typeface="Google Sans Text"/>
+              </a:rPr>
+              <a:t>=25um) para ambos brazos. Al comparar la gráfica obtenida mediante SAX con la del modelo analítico previo, podemos ver que sus comportamientos de las FDT coinciden exactamente. Ambas tienen una transmisión máxima y constante de 1 en uno de los puertos cruzados y una anulación total (0) en el otro. Esta coincidencia de los resultados confirma que los modelos base de la guía de onda y del acoplador direccional en SAX, están definidos correctamente y sin errores, replicando fielmente la física teórica del dispositivo.</a:t>
+            </a:r>
+          </a:p>
+        </p:txBody>
+      </p:sp>
     </p:spTree>
     <p:extLst>
       <p:ext uri="{BB962C8B-B14F-4D97-AF65-F5344CB8AC3E}">

--- a/LabBook_3.pptx
+++ b/LabBook_3.pptx
@@ -5,10 +5,10 @@
     <p:sldMasterId id="2147483648" r:id="rId1"/>
   </p:sldMasterIdLst>
   <p:notesMasterIdLst>
-    <p:notesMasterId r:id="rId12"/>
+    <p:notesMasterId r:id="rId15"/>
   </p:notesMasterIdLst>
   <p:handoutMasterIdLst>
-    <p:handoutMasterId r:id="rId13"/>
+    <p:handoutMasterId r:id="rId16"/>
   </p:handoutMasterIdLst>
   <p:sldIdLst>
     <p:sldId id="256" r:id="rId2"/>
@@ -20,7 +20,10 @@
     <p:sldId id="296" r:id="rId8"/>
     <p:sldId id="299" r:id="rId9"/>
     <p:sldId id="293" r:id="rId10"/>
-    <p:sldId id="288" r:id="rId11"/>
+    <p:sldId id="300" r:id="rId11"/>
+    <p:sldId id="301" r:id="rId12"/>
+    <p:sldId id="302" r:id="rId13"/>
+    <p:sldId id="288" r:id="rId14"/>
   </p:sldIdLst>
   <p:sldSz cx="12192000" cy="6858000"/>
   <p:notesSz cx="12192000" cy="6858000"/>
@@ -235,7 +238,7 @@
           <a:p>
             <a:fld id="{8438F8DC-35B0-48E6-A86E-42F1F08DD00F}" type="datetimeFigureOut">
               <a:rPr lang="es-ES" smtClean="0"/>
-              <a:t>09/03/2026</a:t>
+              <a:t>22/03/2026</a:t>
             </a:fld>
             <a:endParaRPr lang="es-ES"/>
           </a:p>
@@ -412,7 +415,7 @@
           <a:p>
             <a:fld id="{FACBDC12-F39B-4B97-8F4D-6734F9D366FF}" type="datetimeFigureOut">
               <a:rPr lang="es-ES" smtClean="0"/>
-              <a:t>09/03/2026</a:t>
+              <a:t>22/03/2026</a:t>
             </a:fld>
             <a:endParaRPr lang="es-ES"/>
           </a:p>
@@ -2723,6 +2726,966 @@
   <p:cSld>
     <p:spTree>
       <p:nvGrpSpPr>
+        <p:cNvPr id="1" name="">
+          <a:extLst>
+            <a:ext uri="{FF2B5EF4-FFF2-40B4-BE49-F238E27FC236}">
+              <a16:creationId xmlns:a16="http://schemas.microsoft.com/office/drawing/2014/main" id="{5B402102-EFB7-9B5E-498F-8C5752A06A88}"/>
+            </a:ext>
+          </a:extLst>
+        </p:cNvPr>
+        <p:cNvGrpSpPr/>
+        <p:nvPr/>
+      </p:nvGrpSpPr>
+      <p:grpSpPr>
+        <a:xfrm>
+          <a:off x="0" y="0"/>
+          <a:ext cx="0" cy="0"/>
+          <a:chOff x="0" y="0"/>
+          <a:chExt cx="0" cy="0"/>
+        </a:xfrm>
+      </p:grpSpPr>
+      <p:sp>
+        <p:nvSpPr>
+          <p:cNvPr id="2" name="Título 1">
+            <a:extLst>
+              <a:ext uri="{FF2B5EF4-FFF2-40B4-BE49-F238E27FC236}">
+                <a16:creationId xmlns:a16="http://schemas.microsoft.com/office/drawing/2014/main" id="{0BACA8AF-CEA7-1C50-0EAE-9E074568B961}"/>
+              </a:ext>
+            </a:extLst>
+          </p:cNvPr>
+          <p:cNvSpPr>
+            <a:spLocks noGrp="1"/>
+          </p:cNvSpPr>
+          <p:nvPr>
+            <p:ph type="title"/>
+          </p:nvPr>
+        </p:nvSpPr>
+        <p:spPr>
+          <a:xfrm>
+            <a:off x="600075" y="316301"/>
+            <a:ext cx="10991850" cy="307777"/>
+          </a:xfrm>
+        </p:spPr>
+        <p:txBody>
+          <a:bodyPr/>
+          <a:lstStyle/>
+          <a:p>
+            <a:r>
+              <a:rPr lang="es-ES" dirty="0"/>
+              <a:t>RESULTADO ASSESSMENT 4</a:t>
+            </a:r>
+          </a:p>
+        </p:txBody>
+      </p:sp>
+      <p:sp>
+        <p:nvSpPr>
+          <p:cNvPr id="4" name="Marcador de pie de página 3">
+            <a:extLst>
+              <a:ext uri="{FF2B5EF4-FFF2-40B4-BE49-F238E27FC236}">
+                <a16:creationId xmlns:a16="http://schemas.microsoft.com/office/drawing/2014/main" id="{73C069A9-3FDF-3C09-8925-033C88CDD698}"/>
+              </a:ext>
+            </a:extLst>
+          </p:cNvPr>
+          <p:cNvSpPr>
+            <a:spLocks noGrp="1"/>
+          </p:cNvSpPr>
+          <p:nvPr>
+            <p:ph type="ftr" sz="quarter" idx="5"/>
+          </p:nvPr>
+        </p:nvSpPr>
+        <p:spPr/>
+        <p:txBody>
+          <a:bodyPr/>
+          <a:lstStyle/>
+          <a:p>
+            <a:pPr marL="12700">
+              <a:spcBef>
+                <a:spcPts val="15"/>
+              </a:spcBef>
+            </a:pPr>
+            <a:r>
+              <a:rPr lang="es-ES" spc="-5"/>
+              <a:t>LAB 3. INTERFEROMETERS I</a:t>
+            </a:r>
+            <a:endParaRPr lang="es-ES" spc="-5" dirty="0"/>
+          </a:p>
+        </p:txBody>
+      </p:sp>
+      <p:sp>
+        <p:nvSpPr>
+          <p:cNvPr id="5" name="Marcador de número de diapositiva 4">
+            <a:extLst>
+              <a:ext uri="{FF2B5EF4-FFF2-40B4-BE49-F238E27FC236}">
+                <a16:creationId xmlns:a16="http://schemas.microsoft.com/office/drawing/2014/main" id="{76178692-9055-D866-F184-BC07CF583E41}"/>
+              </a:ext>
+            </a:extLst>
+          </p:cNvPr>
+          <p:cNvSpPr>
+            <a:spLocks noGrp="1"/>
+          </p:cNvSpPr>
+          <p:nvPr>
+            <p:ph type="sldNum" sz="quarter" idx="7"/>
+          </p:nvPr>
+        </p:nvSpPr>
+        <p:spPr/>
+        <p:txBody>
+          <a:bodyPr/>
+          <a:lstStyle/>
+          <a:p>
+            <a:fld id="{B6F15528-21DE-4FAA-801E-634DDDAF4B2B}" type="slidenum">
+              <a:rPr lang="es-ES" smtClean="0"/>
+              <a:t>10</a:t>
+            </a:fld>
+            <a:endParaRPr lang="es-ES"/>
+          </a:p>
+        </p:txBody>
+      </p:sp>
+      <p:pic>
+        <p:nvPicPr>
+          <p:cNvPr id="6" name="Imagen 5">
+            <a:extLst>
+              <a:ext uri="{FF2B5EF4-FFF2-40B4-BE49-F238E27FC236}">
+                <a16:creationId xmlns:a16="http://schemas.microsoft.com/office/drawing/2014/main" id="{7688E497-4CC4-0DD9-0FD6-42BA7FEE4F4F}"/>
+              </a:ext>
+            </a:extLst>
+          </p:cNvPr>
+          <p:cNvPicPr>
+            <a:picLocks noChangeAspect="1"/>
+          </p:cNvPicPr>
+          <p:nvPr/>
+        </p:nvPicPr>
+        <p:blipFill>
+          <a:blip r:embed="rId2"/>
+          <a:stretch>
+            <a:fillRect/>
+          </a:stretch>
+        </p:blipFill>
+        <p:spPr>
+          <a:xfrm>
+            <a:off x="274857" y="1447800"/>
+            <a:ext cx="6155886" cy="3762375"/>
+          </a:xfrm>
+          <a:prstGeom prst="rect">
+            <a:avLst/>
+          </a:prstGeom>
+        </p:spPr>
+      </p:pic>
+      <p:sp>
+        <p:nvSpPr>
+          <p:cNvPr id="10" name="Rectangle 1">
+            <a:extLst>
+              <a:ext uri="{FF2B5EF4-FFF2-40B4-BE49-F238E27FC236}">
+                <a16:creationId xmlns:a16="http://schemas.microsoft.com/office/drawing/2014/main" id="{09BDA639-D7FF-D119-3475-270927BCF711}"/>
+              </a:ext>
+            </a:extLst>
+          </p:cNvPr>
+          <p:cNvSpPr>
+            <a:spLocks noChangeArrowheads="1"/>
+          </p:cNvSpPr>
+          <p:nvPr/>
+        </p:nvSpPr>
+        <p:spPr bwMode="auto">
+          <a:xfrm>
+            <a:off x="6580429" y="1582355"/>
+            <a:ext cx="5307167" cy="3493264"/>
+          </a:xfrm>
+          <a:prstGeom prst="rect">
+            <a:avLst/>
+          </a:prstGeom>
+          <a:noFill/>
+          <a:ln>
+            <a:noFill/>
+          </a:ln>
+          <a:effectLst/>
+          <a:extLst>
+            <a:ext uri="{909E8E84-426E-40DD-AFC4-6F175D3DCCD1}">
+              <a14:hiddenFill xmlns:a14="http://schemas.microsoft.com/office/drawing/2010/main">
+                <a:solidFill>
+                  <a:schemeClr val="accent1"/>
+                </a:solidFill>
+              </a14:hiddenFill>
+            </a:ext>
+            <a:ext uri="{91240B29-F687-4F45-9708-019B960494DF}">
+              <a14:hiddenLine xmlns:a14="http://schemas.microsoft.com/office/drawing/2010/main" w="9525">
+                <a:solidFill>
+                  <a:schemeClr val="tx1"/>
+                </a:solidFill>
+                <a:miter lim="800000"/>
+                <a:headEnd/>
+                <a:tailEnd/>
+              </a14:hiddenLine>
+            </a:ext>
+            <a:ext uri="{AF507438-7753-43E0-B8FC-AC1667EBCBE1}">
+              <a14:hiddenEffects xmlns:a14="http://schemas.microsoft.com/office/drawing/2010/main">
+                <a:effectLst>
+                  <a:outerShdw dist="35921" dir="2700000" algn="ctr" rotWithShape="0">
+                    <a:schemeClr val="bg2"/>
+                  </a:outerShdw>
+                </a:effectLst>
+              </a14:hiddenEffects>
+            </a:ext>
+          </a:extLst>
+        </p:spPr>
+        <p:txBody>
+          <a:bodyPr vert="horz" wrap="square" lIns="91440" tIns="0" rIns="91440" bIns="45720" numCol="1" anchor="ctr" anchorCtr="0" compatLnSpc="1">
+            <a:prstTxWarp prst="textNoShape">
+              <a:avLst/>
+            </a:prstTxWarp>
+            <a:spAutoFit/>
+          </a:bodyPr>
+          <a:lstStyle/>
+          <a:p>
+            <a:pPr marL="0" marR="0" lvl="0" indent="0" algn="just" defTabSz="914400" rtl="0" eaLnBrk="0" fontAlgn="base" latinLnBrk="0" hangingPunct="0">
+              <a:lnSpc>
+                <a:spcPct val="100000"/>
+              </a:lnSpc>
+              <a:spcBef>
+                <a:spcPct val="0"/>
+              </a:spcBef>
+              <a:spcAft>
+                <a:spcPct val="0"/>
+              </a:spcAft>
+              <a:buClrTx/>
+              <a:buSzTx/>
+              <a:buFontTx/>
+              <a:buNone/>
+              <a:tabLst/>
+            </a:pPr>
+            <a:r>
+              <a:rPr kumimoji="0" lang="es-ES" altLang="es-ES" sz="1600" b="0" i="0" u="none" strike="noStrike" cap="none" normalizeH="0" baseline="0" dirty="0">
+                <a:ln>
+                  <a:noFill/>
+                </a:ln>
+                <a:solidFill>
+                  <a:schemeClr val="tx1"/>
+                </a:solidFill>
+                <a:effectLst/>
+                <a:latin typeface="Google Sans Text"/>
+              </a:rPr>
+              <a:t>Para diseñar el MZI como un filtro con transmisión máxima a 1550 nm , </a:t>
+            </a:r>
+            <a:r>
+              <a:rPr lang="es-ES" altLang="es-ES" sz="1600" dirty="0">
+                <a:latin typeface="Google Sans Text"/>
+              </a:rPr>
+              <a:t>primero se ha establecido una configuración simétrica de los materiales de los dos. Así solo se establece una asimetría en su longitud.</a:t>
+            </a:r>
+            <a:r>
+              <a:rPr kumimoji="0" lang="es-ES" altLang="es-ES" sz="1600" b="0" i="0" u="none" strike="noStrike" cap="none" normalizeH="0" baseline="0" dirty="0">
+                <a:ln>
+                  <a:noFill/>
+                </a:ln>
+                <a:solidFill>
+                  <a:schemeClr val="tx1"/>
+                </a:solidFill>
+                <a:effectLst/>
+                <a:latin typeface="Google Sans Text"/>
+              </a:rPr>
+              <a:t> Luego, se ha calculado su índice efectivo exacto a 1.55 </a:t>
+            </a:r>
+            <a:r>
+              <a:rPr kumimoji="0" lang="es-ES" altLang="es-ES" sz="1600" b="0" i="0" u="none" strike="noStrike" cap="none" normalizeH="0" baseline="0" dirty="0" err="1">
+                <a:ln>
+                  <a:noFill/>
+                </a:ln>
+                <a:solidFill>
+                  <a:schemeClr val="tx1"/>
+                </a:solidFill>
+                <a:effectLst/>
+                <a:latin typeface="Google Sans Text"/>
+              </a:rPr>
+              <a:t>um</a:t>
+            </a:r>
+            <a:r>
+              <a:rPr kumimoji="0" lang="es-ES" altLang="es-ES" sz="1600" b="0" i="0" u="none" strike="noStrike" cap="none" normalizeH="0" baseline="0" dirty="0">
+                <a:ln>
+                  <a:noFill/>
+                </a:ln>
+                <a:solidFill>
+                  <a:schemeClr val="tx1"/>
+                </a:solidFill>
+                <a:effectLst/>
+                <a:latin typeface="Google Sans Text"/>
+              </a:rPr>
+              <a:t> a partir de interpolación cúbica y se ha determinado el desbalance de longitud (</a:t>
+            </a:r>
+            <a:r>
+              <a:rPr kumimoji="0" lang="es-ES" altLang="es-ES" sz="1600" b="0" i="0" u="none" strike="noStrike" cap="none" normalizeH="0" baseline="0" dirty="0" err="1">
+                <a:ln>
+                  <a:noFill/>
+                </a:ln>
+                <a:solidFill>
+                  <a:schemeClr val="tx1"/>
+                </a:solidFill>
+                <a:effectLst/>
+                <a:latin typeface="Google Sans Text"/>
+              </a:rPr>
+              <a:t>delta_L</a:t>
+            </a:r>
+            <a:r>
+              <a:rPr kumimoji="0" lang="es-ES" altLang="es-ES" sz="1600" b="0" i="0" u="none" strike="noStrike" cap="none" normalizeH="0" baseline="0" dirty="0">
+                <a:ln>
+                  <a:noFill/>
+                </a:ln>
+                <a:solidFill>
+                  <a:schemeClr val="tx1"/>
+                </a:solidFill>
+                <a:effectLst/>
+                <a:latin typeface="Google Sans Text"/>
+              </a:rPr>
+              <a:t>) necesario para </a:t>
+            </a:r>
+            <a:r>
+              <a:rPr lang="es-ES" altLang="es-ES" sz="1600" dirty="0">
+                <a:latin typeface="Google Sans Text"/>
+              </a:rPr>
+              <a:t>cumplir con la </a:t>
+            </a:r>
+            <a:r>
+              <a:rPr kumimoji="0" lang="es-ES" altLang="es-ES" sz="1600" b="0" i="0" u="none" strike="noStrike" cap="none" normalizeH="0" baseline="0" dirty="0">
+                <a:ln>
+                  <a:noFill/>
+                </a:ln>
+                <a:solidFill>
+                  <a:schemeClr val="tx1"/>
+                </a:solidFill>
+                <a:effectLst/>
+                <a:latin typeface="Google Sans Text"/>
+              </a:rPr>
+              <a:t>condición de máxima transmisión (diferencia de fase múltiplo </a:t>
+            </a:r>
+            <a:r>
+              <a:rPr kumimoji="0" lang="es-ES" altLang="es-ES" sz="1600" b="0" i="0" u="none" strike="noStrike" cap="none" normalizeH="0" baseline="0" dirty="0" err="1">
+                <a:ln>
+                  <a:noFill/>
+                </a:ln>
+                <a:solidFill>
+                  <a:schemeClr val="tx1"/>
+                </a:solidFill>
+                <a:effectLst/>
+                <a:latin typeface="Google Sans Text"/>
+              </a:rPr>
+              <a:t>dentero</a:t>
+            </a:r>
+            <a:r>
+              <a:rPr kumimoji="0" lang="es-ES" altLang="es-ES" sz="1600" b="0" i="0" u="none" strike="noStrike" cap="none" normalizeH="0" baseline="0" dirty="0">
+                <a:ln>
+                  <a:noFill/>
+                </a:ln>
+                <a:solidFill>
+                  <a:schemeClr val="tx1"/>
+                </a:solidFill>
+                <a:effectLst/>
+                <a:latin typeface="Google Sans Text"/>
+              </a:rPr>
+              <a:t> de 2pi y con un orden de interferencia de m=20). </a:t>
+            </a:r>
+            <a:r>
+              <a:rPr lang="es-ES" altLang="es-ES" sz="1600" dirty="0">
+                <a:latin typeface="Google Sans Text"/>
+              </a:rPr>
+              <a:t>El espectro obtenido con SAX con esa </a:t>
+            </a:r>
+            <a:r>
+              <a:rPr lang="es-ES" altLang="es-ES" sz="1600" dirty="0" err="1">
+                <a:latin typeface="Google Sans Text"/>
+              </a:rPr>
+              <a:t>delta_L</a:t>
+            </a:r>
+            <a:r>
+              <a:rPr lang="es-ES" altLang="es-ES" sz="1600" dirty="0">
+                <a:latin typeface="Google Sans Text"/>
+              </a:rPr>
+              <a:t> </a:t>
+            </a:r>
+            <a:r>
+              <a:rPr kumimoji="0" lang="es-ES" altLang="es-ES" sz="1600" b="0" i="0" u="none" strike="noStrike" cap="none" normalizeH="0" baseline="0" dirty="0">
+                <a:ln>
+                  <a:noFill/>
+                </a:ln>
+                <a:solidFill>
+                  <a:schemeClr val="tx1"/>
+                </a:solidFill>
+                <a:effectLst/>
+                <a:latin typeface="Google Sans Text"/>
+              </a:rPr>
+              <a:t>confirma el comportamiento de filtro periódico. En la gráfica se observa que el puerto cruzado (Cross, H01) llega a una interferencia totalmente constructiva, con su pico de máxima transmisión de manera exacta sobre la línea objetivo de 1550 nm, cumpliendo así con los requisitos del diseño.</a:t>
+            </a:r>
+            <a:endParaRPr kumimoji="0" lang="es-ES" altLang="es-ES" sz="1600" b="0" i="0" u="none" strike="noStrike" cap="none" normalizeH="0" baseline="0" dirty="0">
+              <a:ln>
+                <a:noFill/>
+              </a:ln>
+              <a:solidFill>
+                <a:schemeClr val="tx1"/>
+              </a:solidFill>
+              <a:effectLst/>
+              <a:latin typeface="Arial" panose="020B0604020202020204" pitchFamily="34" charset="0"/>
+            </a:endParaRPr>
+          </a:p>
+        </p:txBody>
+      </p:sp>
+    </p:spTree>
+    <p:extLst>
+      <p:ext uri="{BB962C8B-B14F-4D97-AF65-F5344CB8AC3E}">
+        <p14:creationId xmlns:p14="http://schemas.microsoft.com/office/powerpoint/2010/main" val="409402419"/>
+      </p:ext>
+    </p:extLst>
+  </p:cSld>
+  <p:clrMapOvr>
+    <a:masterClrMapping/>
+  </p:clrMapOvr>
+</p:sld>
+</file>
+
+<file path=ppt/slides/slide11.xml><?xml version="1.0" encoding="utf-8"?>
+<p:sld xmlns:a="http://schemas.openxmlformats.org/drawingml/2006/main" xmlns:r="http://schemas.openxmlformats.org/officeDocument/2006/relationships" xmlns:p="http://schemas.openxmlformats.org/presentationml/2006/main">
+  <p:cSld>
+    <p:spTree>
+      <p:nvGrpSpPr>
+        <p:cNvPr id="1" name="">
+          <a:extLst>
+            <a:ext uri="{FF2B5EF4-FFF2-40B4-BE49-F238E27FC236}">
+              <a16:creationId xmlns:a16="http://schemas.microsoft.com/office/drawing/2014/main" id="{E4D35EA3-F6CC-AFBB-2C2F-D5FE1BD9DC8A}"/>
+            </a:ext>
+          </a:extLst>
+        </p:cNvPr>
+        <p:cNvGrpSpPr/>
+        <p:nvPr/>
+      </p:nvGrpSpPr>
+      <p:grpSpPr>
+        <a:xfrm>
+          <a:off x="0" y="0"/>
+          <a:ext cx="0" cy="0"/>
+          <a:chOff x="0" y="0"/>
+          <a:chExt cx="0" cy="0"/>
+        </a:xfrm>
+      </p:grpSpPr>
+      <p:sp>
+        <p:nvSpPr>
+          <p:cNvPr id="2" name="Título 1">
+            <a:extLst>
+              <a:ext uri="{FF2B5EF4-FFF2-40B4-BE49-F238E27FC236}">
+                <a16:creationId xmlns:a16="http://schemas.microsoft.com/office/drawing/2014/main" id="{A04479EF-EB01-A4AA-BC6D-FB9EDB0F9C0D}"/>
+              </a:ext>
+            </a:extLst>
+          </p:cNvPr>
+          <p:cNvSpPr>
+            <a:spLocks noGrp="1"/>
+          </p:cNvSpPr>
+          <p:nvPr>
+            <p:ph type="title"/>
+          </p:nvPr>
+        </p:nvSpPr>
+        <p:spPr>
+          <a:xfrm>
+            <a:off x="600075" y="316301"/>
+            <a:ext cx="10991850" cy="307777"/>
+          </a:xfrm>
+        </p:spPr>
+        <p:txBody>
+          <a:bodyPr/>
+          <a:lstStyle/>
+          <a:p>
+            <a:r>
+              <a:rPr lang="es-ES" dirty="0"/>
+              <a:t>RESULTADO ASSESSMENT 5</a:t>
+            </a:r>
+          </a:p>
+        </p:txBody>
+      </p:sp>
+      <p:sp>
+        <p:nvSpPr>
+          <p:cNvPr id="4" name="Marcador de pie de página 3">
+            <a:extLst>
+              <a:ext uri="{FF2B5EF4-FFF2-40B4-BE49-F238E27FC236}">
+                <a16:creationId xmlns:a16="http://schemas.microsoft.com/office/drawing/2014/main" id="{F963BC45-0BFE-2131-A2DC-B57F6122FAA6}"/>
+              </a:ext>
+            </a:extLst>
+          </p:cNvPr>
+          <p:cNvSpPr>
+            <a:spLocks noGrp="1"/>
+          </p:cNvSpPr>
+          <p:nvPr>
+            <p:ph type="ftr" sz="quarter" idx="5"/>
+          </p:nvPr>
+        </p:nvSpPr>
+        <p:spPr/>
+        <p:txBody>
+          <a:bodyPr/>
+          <a:lstStyle/>
+          <a:p>
+            <a:pPr marL="12700">
+              <a:spcBef>
+                <a:spcPts val="15"/>
+              </a:spcBef>
+            </a:pPr>
+            <a:r>
+              <a:rPr lang="es-ES" spc="-5"/>
+              <a:t>LAB 3. INTERFEROMETERS I</a:t>
+            </a:r>
+            <a:endParaRPr lang="es-ES" spc="-5" dirty="0"/>
+          </a:p>
+        </p:txBody>
+      </p:sp>
+      <p:sp>
+        <p:nvSpPr>
+          <p:cNvPr id="5" name="Marcador de número de diapositiva 4">
+            <a:extLst>
+              <a:ext uri="{FF2B5EF4-FFF2-40B4-BE49-F238E27FC236}">
+                <a16:creationId xmlns:a16="http://schemas.microsoft.com/office/drawing/2014/main" id="{AB4B94F4-35EE-40CB-81CF-89FACF367B9C}"/>
+              </a:ext>
+            </a:extLst>
+          </p:cNvPr>
+          <p:cNvSpPr>
+            <a:spLocks noGrp="1"/>
+          </p:cNvSpPr>
+          <p:nvPr>
+            <p:ph type="sldNum" sz="quarter" idx="7"/>
+          </p:nvPr>
+        </p:nvSpPr>
+        <p:spPr/>
+        <p:txBody>
+          <a:bodyPr/>
+          <a:lstStyle/>
+          <a:p>
+            <a:fld id="{B6F15528-21DE-4FAA-801E-634DDDAF4B2B}" type="slidenum">
+              <a:rPr lang="es-ES" smtClean="0"/>
+              <a:t>11</a:t>
+            </a:fld>
+            <a:endParaRPr lang="es-ES"/>
+          </a:p>
+        </p:txBody>
+      </p:sp>
+      <p:pic>
+        <p:nvPicPr>
+          <p:cNvPr id="6" name="Imagen 5">
+            <a:extLst>
+              <a:ext uri="{FF2B5EF4-FFF2-40B4-BE49-F238E27FC236}">
+                <a16:creationId xmlns:a16="http://schemas.microsoft.com/office/drawing/2014/main" id="{237D95F3-68DF-9109-5CC1-FD36629E5DCA}"/>
+              </a:ext>
+            </a:extLst>
+          </p:cNvPr>
+          <p:cNvPicPr>
+            <a:picLocks noChangeAspect="1"/>
+          </p:cNvPicPr>
+          <p:nvPr/>
+        </p:nvPicPr>
+        <p:blipFill>
+          <a:blip r:embed="rId2"/>
+          <a:stretch>
+            <a:fillRect/>
+          </a:stretch>
+        </p:blipFill>
+        <p:spPr>
+          <a:xfrm>
+            <a:off x="572084" y="838200"/>
+            <a:ext cx="5327073" cy="3276600"/>
+          </a:xfrm>
+          <a:prstGeom prst="rect">
+            <a:avLst/>
+          </a:prstGeom>
+        </p:spPr>
+      </p:pic>
+      <p:sp>
+        <p:nvSpPr>
+          <p:cNvPr id="7" name="Rectangle 1">
+            <a:extLst>
+              <a:ext uri="{FF2B5EF4-FFF2-40B4-BE49-F238E27FC236}">
+                <a16:creationId xmlns:a16="http://schemas.microsoft.com/office/drawing/2014/main" id="{BBB22FF9-B8EB-796D-4302-850CFBD813AF}"/>
+              </a:ext>
+            </a:extLst>
+          </p:cNvPr>
+          <p:cNvSpPr>
+            <a:spLocks noChangeArrowheads="1"/>
+          </p:cNvSpPr>
+          <p:nvPr/>
+        </p:nvSpPr>
+        <p:spPr bwMode="auto">
+          <a:xfrm>
+            <a:off x="6248400" y="1345420"/>
+            <a:ext cx="5181600" cy="2262158"/>
+          </a:xfrm>
+          <a:prstGeom prst="rect">
+            <a:avLst/>
+          </a:prstGeom>
+          <a:noFill/>
+          <a:ln>
+            <a:noFill/>
+          </a:ln>
+          <a:effectLst/>
+          <a:extLst>
+            <a:ext uri="{909E8E84-426E-40DD-AFC4-6F175D3DCCD1}">
+              <a14:hiddenFill xmlns:a14="http://schemas.microsoft.com/office/drawing/2010/main">
+                <a:solidFill>
+                  <a:schemeClr val="accent1"/>
+                </a:solidFill>
+              </a14:hiddenFill>
+            </a:ext>
+            <a:ext uri="{91240B29-F687-4F45-9708-019B960494DF}">
+              <a14:hiddenLine xmlns:a14="http://schemas.microsoft.com/office/drawing/2010/main" w="9525">
+                <a:solidFill>
+                  <a:schemeClr val="tx1"/>
+                </a:solidFill>
+                <a:miter lim="800000"/>
+                <a:headEnd/>
+                <a:tailEnd/>
+              </a14:hiddenLine>
+            </a:ext>
+            <a:ext uri="{AF507438-7753-43E0-B8FC-AC1667EBCBE1}">
+              <a14:hiddenEffects xmlns:a14="http://schemas.microsoft.com/office/drawing/2010/main">
+                <a:effectLst>
+                  <a:outerShdw dist="35921" dir="2700000" algn="ctr" rotWithShape="0">
+                    <a:schemeClr val="bg2"/>
+                  </a:outerShdw>
+                </a:effectLst>
+              </a14:hiddenEffects>
+            </a:ext>
+          </a:extLst>
+        </p:spPr>
+        <p:txBody>
+          <a:bodyPr vert="horz" wrap="square" lIns="91440" tIns="0" rIns="91440" bIns="45720" numCol="1" anchor="ctr" anchorCtr="0" compatLnSpc="1">
+            <a:prstTxWarp prst="textNoShape">
+              <a:avLst/>
+            </a:prstTxWarp>
+            <a:spAutoFit/>
+          </a:bodyPr>
+          <a:lstStyle/>
+          <a:p>
+            <a:pPr marL="0" marR="0" lvl="0" indent="0" algn="just" defTabSz="914400" rtl="0" eaLnBrk="0" fontAlgn="base" latinLnBrk="0" hangingPunct="0">
+              <a:lnSpc>
+                <a:spcPct val="100000"/>
+              </a:lnSpc>
+              <a:spcBef>
+                <a:spcPct val="0"/>
+              </a:spcBef>
+              <a:spcAft>
+                <a:spcPct val="0"/>
+              </a:spcAft>
+              <a:buClrTx/>
+              <a:buSzTx/>
+              <a:buFontTx/>
+              <a:buNone/>
+              <a:tabLst/>
+            </a:pPr>
+            <a:r>
+              <a:rPr lang="es-ES" altLang="es-ES" sz="1600" dirty="0">
+                <a:latin typeface="Google Sans Text"/>
+              </a:rPr>
+              <a:t>Ahora el puerto superior mantiene el mismo </a:t>
+            </a:r>
+            <a:r>
+              <a:rPr lang="es-ES" altLang="es-ES" sz="1600" dirty="0" err="1">
+                <a:latin typeface="Google Sans Text"/>
+              </a:rPr>
+              <a:t>cladding</a:t>
+            </a:r>
+            <a:r>
+              <a:rPr lang="es-ES" altLang="es-ES" sz="1600" dirty="0">
+                <a:latin typeface="Google Sans Text"/>
+              </a:rPr>
+              <a:t> pero el inferior ahora está en medio acuoso. Al cambiar el entorno de la guía de onda, el índice de refracción efectivo varía, lo que altera la velocidad de propagación de la luz y modifica el camino óptico recorrido en ese tramo. Ten la gráfica se puede ver que esta alteración genera una diferencia de fase adicional que genera un desplazamiento horizontal del patrón de respecto al espectro original, manteniendo prácticamente intactos la amplitud y el FSR.</a:t>
+            </a:r>
+          </a:p>
+        </p:txBody>
+      </p:sp>
+      <p:sp>
+        <p:nvSpPr>
+          <p:cNvPr id="8" name="CuadroTexto 7">
+            <a:extLst>
+              <a:ext uri="{FF2B5EF4-FFF2-40B4-BE49-F238E27FC236}">
+                <a16:creationId xmlns:a16="http://schemas.microsoft.com/office/drawing/2014/main" id="{F63BF62F-9E07-CE3F-2F9D-AF2FC0089617}"/>
+              </a:ext>
+            </a:extLst>
+          </p:cNvPr>
+          <p:cNvSpPr txBox="1"/>
+          <p:nvPr/>
+        </p:nvSpPr>
+        <p:spPr>
+          <a:xfrm>
+            <a:off x="685800" y="4366242"/>
+            <a:ext cx="10906125" cy="1323439"/>
+          </a:xfrm>
+          <a:prstGeom prst="rect">
+            <a:avLst/>
+          </a:prstGeom>
+          <a:noFill/>
+        </p:spPr>
+        <p:txBody>
+          <a:bodyPr wrap="square">
+            <a:spAutoFit/>
+          </a:bodyPr>
+          <a:lstStyle/>
+          <a:p>
+            <a:pPr algn="just"/>
+            <a:r>
+              <a:rPr lang="es-ES" sz="1600" dirty="0"/>
+              <a:t>Este tipo de diseño se podría usar para </a:t>
+            </a:r>
+            <a:r>
+              <a:rPr lang="es-ES" sz="1600" dirty="0" err="1"/>
+              <a:t>biosensado</a:t>
+            </a:r>
+            <a:r>
+              <a:rPr lang="es-ES" sz="1600" dirty="0"/>
+              <a:t>. Por un lado, esta el brazo de referencia y por el otro está el otro brazo que se deja expuesto al medio que se desee analizar. Dependiendo del fluido que lo recubra, cambiará el índice efectivo y por lo tanto un desplazamiento en el espectro. A partir de la medida de este desplazamiento, se podría deducir la concentración de la sustancia detectada.</a:t>
+            </a:r>
+          </a:p>
+          <a:p>
+            <a:pPr algn="just"/>
+            <a:endParaRPr lang="es-ES" sz="1600" dirty="0"/>
+          </a:p>
+        </p:txBody>
+      </p:sp>
+    </p:spTree>
+    <p:extLst>
+      <p:ext uri="{BB962C8B-B14F-4D97-AF65-F5344CB8AC3E}">
+        <p14:creationId xmlns:p14="http://schemas.microsoft.com/office/powerpoint/2010/main" val="3704534873"/>
+      </p:ext>
+    </p:extLst>
+  </p:cSld>
+  <p:clrMapOvr>
+    <a:masterClrMapping/>
+  </p:clrMapOvr>
+</p:sld>
+</file>
+
+<file path=ppt/slides/slide12.xml><?xml version="1.0" encoding="utf-8"?>
+<p:sld xmlns:a="http://schemas.openxmlformats.org/drawingml/2006/main" xmlns:r="http://schemas.openxmlformats.org/officeDocument/2006/relationships" xmlns:p="http://schemas.openxmlformats.org/presentationml/2006/main">
+  <p:cSld>
+    <p:spTree>
+      <p:nvGrpSpPr>
+        <p:cNvPr id="1" name="">
+          <a:extLst>
+            <a:ext uri="{FF2B5EF4-FFF2-40B4-BE49-F238E27FC236}">
+              <a16:creationId xmlns:a16="http://schemas.microsoft.com/office/drawing/2014/main" id="{B427BE13-3888-A747-ECCF-71DFC22514BA}"/>
+            </a:ext>
+          </a:extLst>
+        </p:cNvPr>
+        <p:cNvGrpSpPr/>
+        <p:nvPr/>
+      </p:nvGrpSpPr>
+      <p:grpSpPr>
+        <a:xfrm>
+          <a:off x="0" y="0"/>
+          <a:ext cx="0" cy="0"/>
+          <a:chOff x="0" y="0"/>
+          <a:chExt cx="0" cy="0"/>
+        </a:xfrm>
+      </p:grpSpPr>
+      <p:sp>
+        <p:nvSpPr>
+          <p:cNvPr id="2" name="Título 1">
+            <a:extLst>
+              <a:ext uri="{FF2B5EF4-FFF2-40B4-BE49-F238E27FC236}">
+                <a16:creationId xmlns:a16="http://schemas.microsoft.com/office/drawing/2014/main" id="{1C50859F-5E45-EAA1-170C-8ACCBF56DFF3}"/>
+              </a:ext>
+            </a:extLst>
+          </p:cNvPr>
+          <p:cNvSpPr>
+            <a:spLocks noGrp="1"/>
+          </p:cNvSpPr>
+          <p:nvPr>
+            <p:ph type="title"/>
+          </p:nvPr>
+        </p:nvSpPr>
+        <p:spPr>
+          <a:xfrm>
+            <a:off x="600075" y="316301"/>
+            <a:ext cx="10991850" cy="307777"/>
+          </a:xfrm>
+        </p:spPr>
+        <p:txBody>
+          <a:bodyPr/>
+          <a:lstStyle/>
+          <a:p>
+            <a:r>
+              <a:rPr lang="es-ES" dirty="0"/>
+              <a:t>RESULTADO ADVANCED LEVEL ASSESSMENT </a:t>
+            </a:r>
+          </a:p>
+        </p:txBody>
+      </p:sp>
+      <p:sp>
+        <p:nvSpPr>
+          <p:cNvPr id="4" name="Marcador de pie de página 3">
+            <a:extLst>
+              <a:ext uri="{FF2B5EF4-FFF2-40B4-BE49-F238E27FC236}">
+                <a16:creationId xmlns:a16="http://schemas.microsoft.com/office/drawing/2014/main" id="{8B4ECF35-CE5C-0926-D19B-A7DEEF586E70}"/>
+              </a:ext>
+            </a:extLst>
+          </p:cNvPr>
+          <p:cNvSpPr>
+            <a:spLocks noGrp="1"/>
+          </p:cNvSpPr>
+          <p:nvPr>
+            <p:ph type="ftr" sz="quarter" idx="5"/>
+          </p:nvPr>
+        </p:nvSpPr>
+        <p:spPr/>
+        <p:txBody>
+          <a:bodyPr/>
+          <a:lstStyle/>
+          <a:p>
+            <a:pPr marL="12700">
+              <a:spcBef>
+                <a:spcPts val="15"/>
+              </a:spcBef>
+            </a:pPr>
+            <a:r>
+              <a:rPr lang="es-ES" spc="-5"/>
+              <a:t>LAB 3. INTERFEROMETERS I</a:t>
+            </a:r>
+            <a:endParaRPr lang="es-ES" spc="-5" dirty="0"/>
+          </a:p>
+        </p:txBody>
+      </p:sp>
+      <p:sp>
+        <p:nvSpPr>
+          <p:cNvPr id="5" name="Marcador de número de diapositiva 4">
+            <a:extLst>
+              <a:ext uri="{FF2B5EF4-FFF2-40B4-BE49-F238E27FC236}">
+                <a16:creationId xmlns:a16="http://schemas.microsoft.com/office/drawing/2014/main" id="{CE84149E-8E98-0C13-E67C-0B7B08661B49}"/>
+              </a:ext>
+            </a:extLst>
+          </p:cNvPr>
+          <p:cNvSpPr>
+            <a:spLocks noGrp="1"/>
+          </p:cNvSpPr>
+          <p:nvPr>
+            <p:ph type="sldNum" sz="quarter" idx="7"/>
+          </p:nvPr>
+        </p:nvSpPr>
+        <p:spPr/>
+        <p:txBody>
+          <a:bodyPr/>
+          <a:lstStyle/>
+          <a:p>
+            <a:fld id="{B6F15528-21DE-4FAA-801E-634DDDAF4B2B}" type="slidenum">
+              <a:rPr lang="es-ES" smtClean="0"/>
+              <a:t>12</a:t>
+            </a:fld>
+            <a:endParaRPr lang="es-ES"/>
+          </a:p>
+        </p:txBody>
+      </p:sp>
+      <p:pic>
+        <p:nvPicPr>
+          <p:cNvPr id="6" name="Imagen 5">
+            <a:extLst>
+              <a:ext uri="{FF2B5EF4-FFF2-40B4-BE49-F238E27FC236}">
+                <a16:creationId xmlns:a16="http://schemas.microsoft.com/office/drawing/2014/main" id="{2A551314-E0D9-46A0-BBBA-CF30ADFEE090}"/>
+              </a:ext>
+            </a:extLst>
+          </p:cNvPr>
+          <p:cNvPicPr>
+            <a:picLocks noChangeAspect="1"/>
+          </p:cNvPicPr>
+          <p:nvPr/>
+        </p:nvPicPr>
+        <p:blipFill>
+          <a:blip r:embed="rId2"/>
+          <a:stretch>
+            <a:fillRect/>
+          </a:stretch>
+        </p:blipFill>
+        <p:spPr>
+          <a:xfrm>
+            <a:off x="152400" y="1331046"/>
+            <a:ext cx="5607168" cy="3595687"/>
+          </a:xfrm>
+          <a:prstGeom prst="rect">
+            <a:avLst/>
+          </a:prstGeom>
+        </p:spPr>
+      </p:pic>
+      <p:sp>
+        <p:nvSpPr>
+          <p:cNvPr id="8" name="CuadroTexto 7">
+            <a:extLst>
+              <a:ext uri="{FF2B5EF4-FFF2-40B4-BE49-F238E27FC236}">
+                <a16:creationId xmlns:a16="http://schemas.microsoft.com/office/drawing/2014/main" id="{18ED49D3-29B8-83D5-9393-87321B6E87DC}"/>
+              </a:ext>
+            </a:extLst>
+          </p:cNvPr>
+          <p:cNvSpPr txBox="1"/>
+          <p:nvPr/>
+        </p:nvSpPr>
+        <p:spPr>
+          <a:xfrm>
+            <a:off x="6096000" y="1236064"/>
+            <a:ext cx="5705668" cy="3785652"/>
+          </a:xfrm>
+          <a:prstGeom prst="rect">
+            <a:avLst/>
+          </a:prstGeom>
+          <a:noFill/>
+        </p:spPr>
+        <p:txBody>
+          <a:bodyPr wrap="square">
+            <a:spAutoFit/>
+          </a:bodyPr>
+          <a:lstStyle/>
+          <a:p>
+            <a:pPr algn="just"/>
+            <a:r>
+              <a:rPr lang="es-ES" sz="1600" dirty="0"/>
+              <a:t>Tenemos un sistema con dos MZI en serie configurados con desbalances de longitud distintos, esto genera periodicidades diferentes (FSR de 40 nm y 50 nm). En la gráfica, los dos MZI han sido sintonizados para que uno de sus picos de máxima transmisión coincida exactamente en 1550 nm. Al multiplicar sus respuestas individuales para obtener la función de transferencia global del sistema en cascada, se produce el efecto Vernier. </a:t>
+            </a:r>
+          </a:p>
+          <a:p>
+            <a:pPr algn="just"/>
+            <a:endParaRPr lang="es-ES" sz="1600" dirty="0"/>
+          </a:p>
+          <a:p>
+            <a:pPr algn="just"/>
+            <a:r>
+              <a:rPr lang="es-ES" sz="1600" dirty="0"/>
+              <a:t>En las longitudes de onda adyacentes a 1550nm, la diferencia de FSR provoca que los picos se desalineen, haciendo que un MZI atenúe la luz que el otro intenta dejar pasar. Este fenómeno suprime los lóbulos laterales (como se aprecia en la fuerte atenuación de las crestas secundarias en 1.515 </a:t>
+            </a:r>
+            <a:r>
+              <a:rPr lang="es-ES" sz="1600" dirty="0" err="1"/>
+              <a:t>um</a:t>
+            </a:r>
+            <a:r>
+              <a:rPr lang="es-ES" sz="1600" dirty="0"/>
+              <a:t> y 1.585 </a:t>
+            </a:r>
+            <a:r>
+              <a:rPr lang="es-ES" sz="1600" dirty="0" err="1"/>
+              <a:t>um</a:t>
+            </a:r>
+            <a:r>
+              <a:rPr lang="es-ES" sz="1600" dirty="0"/>
+              <a:t>).</a:t>
+            </a:r>
+          </a:p>
+          <a:p>
+            <a:pPr algn="just"/>
+            <a:r>
+              <a:rPr lang="es-ES" sz="1600" dirty="0"/>
+              <a:t>Esto convierte al sistema en un filtro óptico que aísla la banda central y aumenta el FSR del dispositivo.</a:t>
+            </a:r>
+          </a:p>
+        </p:txBody>
+      </p:sp>
+    </p:spTree>
+    <p:extLst>
+      <p:ext uri="{BB962C8B-B14F-4D97-AF65-F5344CB8AC3E}">
+        <p14:creationId xmlns:p14="http://schemas.microsoft.com/office/powerpoint/2010/main" val="1823125862"/>
+      </p:ext>
+    </p:extLst>
+  </p:cSld>
+  <p:clrMapOvr>
+    <a:masterClrMapping/>
+  </p:clrMapOvr>
+</p:sld>
+</file>
+
+<file path=ppt/slides/slide13.xml><?xml version="1.0" encoding="utf-8"?>
+<p:sld xmlns:a="http://schemas.openxmlformats.org/drawingml/2006/main" xmlns:r="http://schemas.openxmlformats.org/officeDocument/2006/relationships" xmlns:p="http://schemas.openxmlformats.org/presentationml/2006/main">
+  <p:cSld>
+    <p:spTree>
+      <p:nvGrpSpPr>
         <p:cNvPr id="1" name=""/>
         <p:cNvGrpSpPr/>
         <p:nvPr/>
@@ -2857,7 +3820,7 @@
           <a:p>
             <a:fld id="{B6F15528-21DE-4FAA-801E-634DDDAF4B2B}" type="slidenum">
               <a:rPr lang="es-ES" smtClean="0"/>
-              <a:t>10</a:t>
+              <a:t>13</a:t>
             </a:fld>
             <a:endParaRPr lang="es-ES"/>
           </a:p>
@@ -5791,7 +6754,7 @@
             </a:r>
             <a:r>
               <a:rPr lang="es-ES" sz="1600" dirty="0"/>
-              <a:t> = 0) y al uso de acopladores perfectamente balanceados al 50%, la amplitud de las oscilaciones van de 0 a 1, definiendo así un FSR finito y fácilmente medible.</a:t>
+              <a:t> = 0) y al uso de acopladores perfectamente balanceados al 50%, la amplitud de las oscilaciones van de 0 a 1, definiendo así un FSR finito y fácil de medir.</a:t>
             </a:r>
           </a:p>
         </p:txBody>
@@ -7796,7 +8759,7 @@
               <a:rPr lang="es-ES" altLang="es-ES" sz="1600" dirty="0">
                 <a:latin typeface="Google Sans Text"/>
               </a:rPr>
-              <a:t>Se ha establecido una configuración completamente balanceada, usando el mismo material (SOI) y la misma longitud geométrica (Lu=25um y </a:t>
+              <a:t>He usado una configuración completamente balanceada, usando el mismo material (SOI) y la misma longitud geométrica (Lu=25um y </a:t>
             </a:r>
             <a:r>
               <a:rPr lang="es-ES" altLang="es-ES" sz="1600" dirty="0" err="1">
